--- a/decks/oncall-rotation/oncall-rotation.pptx
+++ b/decks/oncall-rotation/oncall-rotation.pptx
@@ -1210,6 +1210,13 @@
 <file path=ppt/slides/slide1.xml><?xml version="1.0" encoding="utf-8"?>
 <p:sld xmlns:a="http://schemas.openxmlformats.org/drawingml/2006/main" xmlns:r="http://schemas.openxmlformats.org/officeDocument/2006/relationships" xmlns:p="http://schemas.openxmlformats.org/presentationml/2006/main">
   <p:cSld name="Slide 1">
+    <p:bg>
+      <p:bgPr>
+        <a:solidFill>
+          <a:srgbClr val="F2EBDF"/>
+        </a:solidFill>
+      </p:bgPr>
+    </p:bg>
     <p:spTree>
       <p:nvGrpSpPr>
         <p:cNvPr id="1" name=""/>
@@ -1224,30 +1231,394 @@
           <a:chExt cx="0" cy="0"/>
         </a:xfrm>
       </p:grpSpPr>
+      <p:sp>
+        <p:nvSpPr>
+          <p:cNvPr id="2" name="Text 0"/>
+          <p:cNvSpPr/>
+          <p:nvPr/>
+        </p:nvSpPr>
+        <p:spPr>
+          <a:xfrm>
+            <a:off x="947897" y="677267"/>
+            <a:ext cx="2045209" cy="284361"/>
+          </a:xfrm>
+          <a:prstGeom prst="rect">
+            <a:avLst/>
+          </a:prstGeom>
+          <a:noFill/>
+          <a:ln/>
+        </p:spPr>
+        <p:txBody>
+          <a:bodyPr wrap="square" lIns="0" tIns="0" rIns="0" bIns="0" rtlCol="0" anchor="t"/>
+          <a:lstStyle/>
+          <a:p>
+            <a:pPr algn="l" indent="0" marL="0">
+              <a:lnSpc>
+                <a:spcPts val="2240"/>
+              </a:lnSpc>
+              <a:buNone/>
+            </a:pPr>
+            <a:r>
+              <a:rPr lang="en-US" sz="1600" b="1" dirty="0">
+                <a:solidFill>
+                  <a:srgbClr val="C2693F"/>
+                </a:solidFill>
+                <a:latin typeface="Work Sans" pitchFamily="34" charset="0"/>
+                <a:ea typeface="Work Sans" pitchFamily="34" charset="-122"/>
+                <a:cs typeface="Work Sans" pitchFamily="34" charset="-120"/>
+              </a:rPr>
+              <a:t>ON-CALL DESIGN</a:t>
+            </a:r>
+            <a:endParaRPr lang="en-US" sz="1600" dirty="0"/>
+          </a:p>
+        </p:txBody>
+      </p:sp>
+      <p:sp>
+        <p:nvSpPr>
+          <p:cNvPr id="3" name="Text 1"/>
+          <p:cNvSpPr/>
+          <p:nvPr/>
+        </p:nvSpPr>
+        <p:spPr>
+          <a:xfrm>
+            <a:off x="10454248" y="677267"/>
+            <a:ext cx="802543" cy="284361"/>
+          </a:xfrm>
+          <a:prstGeom prst="rect">
+            <a:avLst/>
+          </a:prstGeom>
+          <a:noFill/>
+          <a:ln/>
+        </p:spPr>
+        <p:txBody>
+          <a:bodyPr wrap="square" lIns="0" tIns="0" rIns="0" bIns="0" rtlCol="0" anchor="t"/>
+          <a:lstStyle/>
+          <a:p>
+            <a:pPr algn="l" indent="0" marL="0">
+              <a:lnSpc>
+                <a:spcPts val="2240"/>
+              </a:lnSpc>
+              <a:buNone/>
+            </a:pPr>
+            <a:r>
+              <a:rPr lang="en-US" sz="1600" b="1" dirty="0">
+                <a:solidFill>
+                  <a:srgbClr val="8A8170"/>
+                </a:solidFill>
+                <a:latin typeface="Work Sans" pitchFamily="34" charset="0"/>
+                <a:ea typeface="Work Sans" pitchFamily="34" charset="-122"/>
+                <a:cs typeface="Work Sans" pitchFamily="34" charset="-120"/>
+              </a:rPr>
+              <a:t>01 / 05</a:t>
+            </a:r>
+            <a:endParaRPr lang="en-US" sz="1600" dirty="0"/>
+          </a:p>
+        </p:txBody>
+      </p:sp>
+      <p:sp>
+        <p:nvSpPr>
+          <p:cNvPr id="4" name="Text 2"/>
+          <p:cNvSpPr/>
+          <p:nvPr/>
+        </p:nvSpPr>
+        <p:spPr>
+          <a:xfrm>
+            <a:off x="947897" y="1368425"/>
+            <a:ext cx="6768796" cy="1778000"/>
+          </a:xfrm>
+          <a:prstGeom prst="rect">
+            <a:avLst/>
+          </a:prstGeom>
+          <a:noFill/>
+          <a:ln/>
+        </p:spPr>
+        <p:txBody>
+          <a:bodyPr wrap="square" lIns="0" tIns="0" rIns="0" bIns="0" rtlCol="0" anchor="t"/>
+          <a:lstStyle/>
+          <a:p>
+            <a:pPr algn="l" indent="0" marL="0">
+              <a:lnSpc>
+                <a:spcPts val="6999"/>
+              </a:lnSpc>
+              <a:buNone/>
+            </a:pPr>
+            <a:r>
+              <a:rPr lang="en-US" sz="5599" dirty="0">
+                <a:solidFill>
+                  <a:srgbClr val="3D3528"/>
+                </a:solidFill>
+                <a:latin typeface="Work Sans" pitchFamily="34" charset="0"/>
+                <a:ea typeface="Work Sans" pitchFamily="34" charset="-122"/>
+                <a:cs typeface="Work Sans" pitchFamily="34" charset="-120"/>
+              </a:rPr>
+              <a:t>On-call rotations</a:t>
+            </a:r>
+            <a:endParaRPr lang="en-US" sz="5599" dirty="0"/>
+          </a:p>
+          <a:p>
+            <a:pPr algn="l" indent="0" marL="0">
+              <a:lnSpc>
+                <a:spcPts val="6999"/>
+              </a:lnSpc>
+              <a:buNone/>
+            </a:pPr>
+            <a:r>
+              <a:rPr lang="en-US" sz="5599" dirty="0">
+                <a:solidFill>
+                  <a:srgbClr val="3D3528"/>
+                </a:solidFill>
+                <a:latin typeface="Work Sans" pitchFamily="34" charset="0"/>
+                <a:ea typeface="Work Sans" pitchFamily="34" charset="-122"/>
+                <a:cs typeface="Work Sans" pitchFamily="34" charset="-120"/>
+              </a:rPr>
+              <a:t>people can survive</a:t>
+            </a:r>
+            <a:endParaRPr lang="en-US" sz="5599" dirty="0"/>
+          </a:p>
+        </p:txBody>
+      </p:sp>
+      <p:sp>
+        <p:nvSpPr>
+          <p:cNvPr id="5" name="Text 3"/>
+          <p:cNvSpPr/>
+          <p:nvPr/>
+        </p:nvSpPr>
+        <p:spPr>
+          <a:xfrm>
+            <a:off x="947897" y="3484959"/>
+            <a:ext cx="6636075" cy="16867"/>
+          </a:xfrm>
+          <a:prstGeom prst="rect">
+            <a:avLst/>
+          </a:prstGeom>
+          <a:solidFill>
+            <a:srgbClr val="D6CCB8"/>
+          </a:solidFill>
+          <a:ln/>
+        </p:spPr>
+        <p:txBody>
+          <a:bodyPr wrap="square" rtlCol="0" anchor="ctr"/>
+          <a:lstStyle/>
+          <a:p>
+            <a:pPr indent="0" marL="0">
+              <a:buNone/>
+            </a:pPr>
+            <a:endParaRPr lang="en-US" dirty="0"/>
+          </a:p>
+        </p:txBody>
+      </p:sp>
+      <p:sp>
+        <p:nvSpPr>
+          <p:cNvPr id="6" name="Text 4"/>
+          <p:cNvSpPr/>
+          <p:nvPr/>
+        </p:nvSpPr>
+        <p:spPr>
+          <a:xfrm>
+            <a:off x="947897" y="3806627"/>
+            <a:ext cx="6768796" cy="914400"/>
+          </a:xfrm>
+          <a:prstGeom prst="rect">
+            <a:avLst/>
+          </a:prstGeom>
+          <a:noFill/>
+          <a:ln/>
+        </p:spPr>
+        <p:txBody>
+          <a:bodyPr wrap="square" lIns="0" tIns="0" rIns="0" bIns="0" rtlCol="0" anchor="t"/>
+          <a:lstStyle/>
+          <a:p>
+            <a:pPr algn="l" indent="0" marL="0">
+              <a:lnSpc>
+                <a:spcPts val="3600"/>
+              </a:lnSpc>
+              <a:buNone/>
+            </a:pPr>
+            <a:r>
+              <a:rPr lang="en-US" sz="2400" dirty="0">
+                <a:solidFill>
+                  <a:srgbClr val="3D3528"/>
+                </a:solidFill>
+                <a:latin typeface="Work Sans" pitchFamily="34" charset="0"/>
+                <a:ea typeface="Work Sans" pitchFamily="34" charset="-122"/>
+                <a:cs typeface="Work Sans" pitchFamily="34" charset="-120"/>
+              </a:rPr>
+              <a:t>Rotation design is a staffing problem,</a:t>
+            </a:r>
+            <a:endParaRPr lang="en-US" sz="2400" dirty="0"/>
+          </a:p>
+          <a:p>
+            <a:pPr algn="l" indent="0" marL="0">
+              <a:lnSpc>
+                <a:spcPts val="3600"/>
+              </a:lnSpc>
+              <a:buNone/>
+            </a:pPr>
+            <a:r>
+              <a:rPr lang="en-US" sz="2400" dirty="0">
+                <a:solidFill>
+                  <a:srgbClr val="3D3528"/>
+                </a:solidFill>
+                <a:latin typeface="Work Sans" pitchFamily="34" charset="0"/>
+                <a:ea typeface="Work Sans" pitchFamily="34" charset="-122"/>
+                <a:cs typeface="Work Sans" pitchFamily="34" charset="-120"/>
+              </a:rPr>
+              <a:t>not a goodwill problem.</a:t>
+            </a:r>
+            <a:endParaRPr lang="en-US" sz="2400" dirty="0"/>
+          </a:p>
+        </p:txBody>
+      </p:sp>
+      <p:sp>
+        <p:nvSpPr>
+          <p:cNvPr id="7" name="Text 5"/>
+          <p:cNvSpPr/>
+          <p:nvPr/>
+        </p:nvSpPr>
+        <p:spPr>
+          <a:xfrm>
+            <a:off x="947897" y="5093494"/>
+            <a:ext cx="6768796" cy="284361"/>
+          </a:xfrm>
+          <a:prstGeom prst="rect">
+            <a:avLst/>
+          </a:prstGeom>
+          <a:noFill/>
+          <a:ln/>
+        </p:spPr>
+        <p:txBody>
+          <a:bodyPr wrap="square" lIns="0" tIns="0" rIns="0" bIns="0" rtlCol="0" anchor="t"/>
+          <a:lstStyle/>
+          <a:p>
+            <a:pPr algn="l" indent="0" marL="0">
+              <a:lnSpc>
+                <a:spcPts val="2240"/>
+              </a:lnSpc>
+              <a:spcBef>
+                <a:spcPts val="2933"/>
+              </a:spcBef>
+              <a:buNone/>
+            </a:pPr>
+            <a:r>
+              <a:rPr lang="en-US" sz="1600" dirty="0">
+                <a:solidFill>
+                  <a:srgbClr val="8A8170"/>
+                </a:solidFill>
+                <a:latin typeface="Work Sans" pitchFamily="34" charset="0"/>
+                <a:ea typeface="Work Sans" pitchFamily="34" charset="-122"/>
+                <a:cs typeface="Work Sans" pitchFamily="34" charset="-120"/>
+              </a:rPr>
+              <a:t>PRESENTER · TEAM</a:t>
+            </a:r>
+            <a:endParaRPr lang="en-US" sz="1600" dirty="0"/>
+          </a:p>
+        </p:txBody>
+      </p:sp>
       <p:pic>
         <p:nvPicPr>
-          <p:cNvPr id="2" name="Image 0" descr="/tmp/slide-1787840550576-qjep6meoce8.png">    </p:cNvPr>
+          <p:cNvPr id="8" name="Image 0" descr="preencoded.png">    </p:cNvPr>
           <p:cNvPicPr>
             <a:picLocks noChangeAspect="1"/>
           </p:cNvPicPr>
           <p:nvPr/>
         </p:nvPicPr>
         <p:blipFill>
-          <a:blip r:embed="rId1"/>
+          <a:blip r:embed="rId1">
+            <a:extLst>
+              <a:ext uri="{96DAC541-7B7A-43D3-8B79-37D633B846F1}">
+                <asvg:svgBlip xmlns:asvg="http://schemas.microsoft.com/office/drawing/2016/SVG/main" r:embed="rId2"/>
+              </a:ext>
+            </a:extLst>
+          </a:blip>
           <a:stretch>
             <a:fillRect/>
           </a:stretch>
         </p:blipFill>
         <p:spPr>
           <a:xfrm>
-            <a:off x="0" y="0"/>
-            <a:ext cx="12188952" cy="6858000"/>
+            <a:off x="8329117" y="1871266"/>
+            <a:ext cx="2573091" cy="2573734"/>
           </a:xfrm>
           <a:prstGeom prst="rect">
             <a:avLst/>
           </a:prstGeom>
         </p:spPr>
       </p:pic>
+      <p:sp>
+        <p:nvSpPr>
+          <p:cNvPr id="9" name="Text 6"/>
+          <p:cNvSpPr/>
+          <p:nvPr/>
+        </p:nvSpPr>
+        <p:spPr>
+          <a:xfrm>
+            <a:off x="947897" y="5784652"/>
+            <a:ext cx="10293157" cy="16867"/>
+          </a:xfrm>
+          <a:prstGeom prst="rect">
+            <a:avLst/>
+          </a:prstGeom>
+          <a:solidFill>
+            <a:srgbClr val="D6CCB8"/>
+          </a:solidFill>
+          <a:ln/>
+        </p:spPr>
+        <p:txBody>
+          <a:bodyPr wrap="square" rtlCol="0" anchor="ctr"/>
+          <a:lstStyle/>
+          <a:p>
+            <a:pPr indent="0" marL="0">
+              <a:buNone/>
+            </a:pPr>
+            <a:endParaRPr lang="en-US" dirty="0"/>
+          </a:p>
+        </p:txBody>
+      </p:sp>
+      <p:sp>
+        <p:nvSpPr>
+          <p:cNvPr id="10" name="Text 7"/>
+          <p:cNvSpPr/>
+          <p:nvPr/>
+        </p:nvSpPr>
+        <p:spPr>
+          <a:xfrm>
+            <a:off x="947897" y="5919986"/>
+            <a:ext cx="10499020" cy="260747"/>
+          </a:xfrm>
+          <a:prstGeom prst="rect">
+            <a:avLst/>
+          </a:prstGeom>
+          <a:noFill/>
+          <a:ln/>
+        </p:spPr>
+        <p:txBody>
+          <a:bodyPr wrap="square" lIns="0" tIns="0" rIns="0" bIns="0" rtlCol="0" anchor="t"/>
+          <a:lstStyle/>
+          <a:p>
+            <a:pPr algn="l" indent="0" marL="0">
+              <a:lnSpc>
+                <a:spcPts val="2053"/>
+              </a:lnSpc>
+              <a:spcBef>
+                <a:spcPts val="933"/>
+              </a:spcBef>
+              <a:buNone/>
+            </a:pPr>
+            <a:r>
+              <a:rPr lang="en-US" sz="1466" dirty="0">
+                <a:solidFill>
+                  <a:srgbClr val="3D3528"/>
+                </a:solidFill>
+                <a:latin typeface="Work Sans" pitchFamily="34" charset="0"/>
+                <a:ea typeface="Work Sans" pitchFamily="34" charset="-122"/>
+                <a:cs typeface="Work Sans" pitchFamily="34" charset="-120"/>
+              </a:rPr>
+              <a:t>No sourced figures: shift hours, page rates and roster sizes are unsourced.</a:t>
+            </a:r>
+            <a:endParaRPr lang="en-US" sz="1466" dirty="0"/>
+          </a:p>
+        </p:txBody>
+      </p:sp>
     </p:spTree>
   </p:cSld>
   <p:clrMapOvr>
@@ -1259,6 +1630,13 @@
 <file path=ppt/slides/slide2.xml><?xml version="1.0" encoding="utf-8"?>
 <p:sld xmlns:a="http://schemas.openxmlformats.org/drawingml/2006/main" xmlns:r="http://schemas.openxmlformats.org/officeDocument/2006/relationships" xmlns:p="http://schemas.openxmlformats.org/presentationml/2006/main">
   <p:cSld name="Slide 2">
+    <p:bg>
+      <p:bgPr>
+        <a:solidFill>
+          <a:srgbClr val="F2EBDF"/>
+        </a:solidFill>
+      </p:bgPr>
+    </p:bg>
     <p:spTree>
       <p:nvGrpSpPr>
         <p:cNvPr id="1" name=""/>
@@ -1273,30 +1651,1065 @@
           <a:chExt cx="0" cy="0"/>
         </a:xfrm>
       </p:grpSpPr>
-      <p:pic>
-        <p:nvPicPr>
-          <p:cNvPr id="2" name="Image 0" descr="/tmp/slide-1787840550838-jqge6nt49yl.png">    </p:cNvPr>
-          <p:cNvPicPr>
-            <a:picLocks noChangeAspect="1"/>
-          </p:cNvPicPr>
-          <p:nvPr/>
-        </p:nvPicPr>
-        <p:blipFill>
-          <a:blip r:embed="rId1"/>
-          <a:stretch>
-            <a:fillRect/>
-          </a:stretch>
-        </p:blipFill>
-        <p:spPr>
-          <a:xfrm>
-            <a:off x="0" y="0"/>
-            <a:ext cx="12188952" cy="6858000"/>
-          </a:xfrm>
-          <a:prstGeom prst="rect">
-            <a:avLst/>
-          </a:prstGeom>
-        </p:spPr>
-      </p:pic>
+      <p:sp>
+        <p:nvSpPr>
+          <p:cNvPr id="2" name="Text 0"/>
+          <p:cNvSpPr/>
+          <p:nvPr/>
+        </p:nvSpPr>
+        <p:spPr>
+          <a:xfrm>
+            <a:off x="947897" y="677267"/>
+            <a:ext cx="1448057" cy="284361"/>
+          </a:xfrm>
+          <a:prstGeom prst="rect">
+            <a:avLst/>
+          </a:prstGeom>
+          <a:noFill/>
+          <a:ln/>
+        </p:spPr>
+        <p:txBody>
+          <a:bodyPr wrap="square" lIns="0" tIns="0" rIns="0" bIns="0" rtlCol="0" anchor="t"/>
+          <a:lstStyle/>
+          <a:p>
+            <a:pPr algn="l" indent="0" marL="0">
+              <a:lnSpc>
+                <a:spcPts val="2240"/>
+              </a:lnSpc>
+              <a:buNone/>
+            </a:pPr>
+            <a:r>
+              <a:rPr lang="en-US" sz="1600" b="1" dirty="0">
+                <a:solidFill>
+                  <a:srgbClr val="C2693F"/>
+                </a:solidFill>
+                <a:latin typeface="Work Sans" pitchFamily="34" charset="0"/>
+                <a:ea typeface="Work Sans" pitchFamily="34" charset="-122"/>
+                <a:cs typeface="Work Sans" pitchFamily="34" charset="-120"/>
+              </a:rPr>
+              <a:t>THE LEVERS</a:t>
+            </a:r>
+            <a:endParaRPr lang="en-US" sz="1600" dirty="0"/>
+          </a:p>
+        </p:txBody>
+      </p:sp>
+      <p:sp>
+        <p:nvSpPr>
+          <p:cNvPr id="3" name="Text 1"/>
+          <p:cNvSpPr/>
+          <p:nvPr/>
+        </p:nvSpPr>
+        <p:spPr>
+          <a:xfrm>
+            <a:off x="10428855" y="677267"/>
+            <a:ext cx="828444" cy="284361"/>
+          </a:xfrm>
+          <a:prstGeom prst="rect">
+            <a:avLst/>
+          </a:prstGeom>
+          <a:noFill/>
+          <a:ln/>
+        </p:spPr>
+        <p:txBody>
+          <a:bodyPr wrap="square" lIns="0" tIns="0" rIns="0" bIns="0" rtlCol="0" anchor="t"/>
+          <a:lstStyle/>
+          <a:p>
+            <a:pPr algn="l" indent="0" marL="0">
+              <a:lnSpc>
+                <a:spcPts val="2240"/>
+              </a:lnSpc>
+              <a:buNone/>
+            </a:pPr>
+            <a:r>
+              <a:rPr lang="en-US" sz="1600" b="1" dirty="0">
+                <a:solidFill>
+                  <a:srgbClr val="8A8170"/>
+                </a:solidFill>
+                <a:latin typeface="Work Sans" pitchFamily="34" charset="0"/>
+                <a:ea typeface="Work Sans" pitchFamily="34" charset="-122"/>
+                <a:cs typeface="Work Sans" pitchFamily="34" charset="-120"/>
+              </a:rPr>
+              <a:t>02 / 05</a:t>
+            </a:r>
+            <a:endParaRPr lang="en-US" sz="1600" dirty="0"/>
+          </a:p>
+        </p:txBody>
+      </p:sp>
+      <p:sp>
+        <p:nvSpPr>
+          <p:cNvPr id="4" name="Text 2"/>
+          <p:cNvSpPr/>
+          <p:nvPr/>
+        </p:nvSpPr>
+        <p:spPr>
+          <a:xfrm>
+            <a:off x="947897" y="1198563"/>
+            <a:ext cx="10499020" cy="609600"/>
+          </a:xfrm>
+          <a:prstGeom prst="rect">
+            <a:avLst/>
+          </a:prstGeom>
+          <a:noFill/>
+          <a:ln/>
+        </p:spPr>
+        <p:txBody>
+          <a:bodyPr wrap="square" lIns="0" tIns="0" rIns="0" bIns="0" rtlCol="0" anchor="t"/>
+          <a:lstStyle/>
+          <a:p>
+            <a:pPr algn="l" indent="0" marL="0">
+              <a:lnSpc>
+                <a:spcPts val="4799"/>
+              </a:lnSpc>
+              <a:spcAft>
+                <a:spcPts val="1333"/>
+              </a:spcAft>
+              <a:buNone/>
+            </a:pPr>
+            <a:r>
+              <a:rPr lang="en-US" sz="3999" dirty="0">
+                <a:solidFill>
+                  <a:srgbClr val="3D3528"/>
+                </a:solidFill>
+                <a:latin typeface="Work Sans" pitchFamily="34" charset="0"/>
+                <a:ea typeface="Work Sans" pitchFamily="34" charset="-122"/>
+                <a:cs typeface="Work Sans" pitchFamily="34" charset="-120"/>
+              </a:rPr>
+              <a:t>A rota is a staffing decision</a:t>
+            </a:r>
+            <a:endParaRPr lang="en-US" sz="3999" dirty="0"/>
+          </a:p>
+        </p:txBody>
+      </p:sp>
+      <p:sp>
+        <p:nvSpPr>
+          <p:cNvPr id="5" name="Text 3"/>
+          <p:cNvSpPr/>
+          <p:nvPr/>
+        </p:nvSpPr>
+        <p:spPr>
+          <a:xfrm>
+            <a:off x="947897" y="1977430"/>
+            <a:ext cx="4977354" cy="1218009"/>
+          </a:xfrm>
+          <a:prstGeom prst="roundRect">
+            <a:avLst>
+              <a:gd name="adj" fmla="val 12511"/>
+            </a:avLst>
+          </a:prstGeom>
+          <a:noFill/>
+          <a:ln w="12698">
+            <a:solidFill>
+              <a:srgbClr val="3D3528"/>
+            </a:solidFill>
+          </a:ln>
+        </p:spPr>
+        <p:txBody>
+          <a:bodyPr wrap="square" rtlCol="0" anchor="ctr"/>
+          <a:lstStyle/>
+          <a:p>
+            <a:pPr indent="0" marL="0">
+              <a:buNone/>
+            </a:pPr>
+            <a:endParaRPr lang="en-US" dirty="0"/>
+          </a:p>
+        </p:txBody>
+      </p:sp>
+      <p:sp>
+        <p:nvSpPr>
+          <p:cNvPr id="6" name="Text 4"/>
+          <p:cNvSpPr/>
+          <p:nvPr/>
+        </p:nvSpPr>
+        <p:spPr>
+          <a:xfrm>
+            <a:off x="1231394" y="2159397"/>
+            <a:ext cx="372374" cy="372467"/>
+          </a:xfrm>
+          <a:prstGeom prst="roundRect">
+            <a:avLst>
+              <a:gd name="adj" fmla="val 327372"/>
+            </a:avLst>
+          </a:prstGeom>
+          <a:solidFill>
+            <a:srgbClr val="C2693F"/>
+          </a:solidFill>
+          <a:ln/>
+        </p:spPr>
+        <p:txBody>
+          <a:bodyPr wrap="square" rtlCol="0" anchor="ctr"/>
+          <a:lstStyle/>
+          <a:p>
+            <a:pPr indent="0" marL="0">
+              <a:buNone/>
+            </a:pPr>
+            <a:endParaRPr lang="en-US" dirty="0"/>
+          </a:p>
+        </p:txBody>
+      </p:sp>
+      <p:sp>
+        <p:nvSpPr>
+          <p:cNvPr id="7" name="Text 5"/>
+          <p:cNvSpPr/>
+          <p:nvPr/>
+        </p:nvSpPr>
+        <p:spPr>
+          <a:xfrm>
+            <a:off x="1373043" y="2203450"/>
+            <a:ext cx="90655" cy="284361"/>
+          </a:xfrm>
+          <a:prstGeom prst="rect">
+            <a:avLst/>
+          </a:prstGeom>
+          <a:noFill/>
+          <a:ln/>
+        </p:spPr>
+        <p:txBody>
+          <a:bodyPr wrap="square" lIns="0" tIns="0" rIns="0" bIns="0" rtlCol="0" anchor="t"/>
+          <a:lstStyle/>
+          <a:p>
+            <a:pPr algn="l" indent="0" marL="0">
+              <a:lnSpc>
+                <a:spcPts val="2240"/>
+              </a:lnSpc>
+              <a:buNone/>
+            </a:pPr>
+            <a:r>
+              <a:rPr lang="en-US" sz="1600" b="1" dirty="0">
+                <a:solidFill>
+                  <a:srgbClr val="FBF7EF"/>
+                </a:solidFill>
+                <a:latin typeface="Work Sans" pitchFamily="34" charset="0"/>
+                <a:ea typeface="Work Sans" pitchFamily="34" charset="-122"/>
+                <a:cs typeface="Work Sans" pitchFamily="34" charset="-120"/>
+              </a:rPr>
+              <a:t>1</a:t>
+            </a:r>
+            <a:endParaRPr lang="en-US" sz="1600" dirty="0"/>
+          </a:p>
+        </p:txBody>
+      </p:sp>
+      <p:sp>
+        <p:nvSpPr>
+          <p:cNvPr id="8" name="Text 6"/>
+          <p:cNvSpPr/>
+          <p:nvPr/>
+        </p:nvSpPr>
+        <p:spPr>
+          <a:xfrm>
+            <a:off x="1739068" y="2162770"/>
+            <a:ext cx="1592944" cy="365522"/>
+          </a:xfrm>
+          <a:prstGeom prst="rect">
+            <a:avLst/>
+          </a:prstGeom>
+          <a:noFill/>
+          <a:ln/>
+        </p:spPr>
+        <p:txBody>
+          <a:bodyPr wrap="square" lIns="0" tIns="0" rIns="0" bIns="0" rtlCol="0" anchor="t"/>
+          <a:lstStyle/>
+          <a:p>
+            <a:pPr algn="l" indent="0" marL="0">
+              <a:lnSpc>
+                <a:spcPts val="2880"/>
+              </a:lnSpc>
+              <a:buNone/>
+            </a:pPr>
+            <a:r>
+              <a:rPr lang="en-US" sz="2133" dirty="0">
+                <a:solidFill>
+                  <a:srgbClr val="3D3528"/>
+                </a:solidFill>
+                <a:latin typeface="Work Sans" pitchFamily="34" charset="0"/>
+                <a:ea typeface="Work Sans" pitchFamily="34" charset="-122"/>
+                <a:cs typeface="Work Sans" pitchFamily="34" charset="-120"/>
+              </a:rPr>
+              <a:t>Shift length</a:t>
+            </a:r>
+            <a:endParaRPr lang="en-US" sz="2133" dirty="0"/>
+          </a:p>
+        </p:txBody>
+      </p:sp>
+      <p:sp>
+        <p:nvSpPr>
+          <p:cNvPr id="9" name="Text 7"/>
+          <p:cNvSpPr/>
+          <p:nvPr/>
+        </p:nvSpPr>
+        <p:spPr>
+          <a:xfrm>
+            <a:off x="1231394" y="2633464"/>
+            <a:ext cx="4498568" cy="343694"/>
+          </a:xfrm>
+          <a:prstGeom prst="rect">
+            <a:avLst/>
+          </a:prstGeom>
+          <a:noFill/>
+          <a:ln/>
+        </p:spPr>
+        <p:txBody>
+          <a:bodyPr wrap="square" lIns="0" tIns="0" rIns="0" bIns="0" rtlCol="0" anchor="t"/>
+          <a:lstStyle/>
+          <a:p>
+            <a:pPr algn="l" indent="0" marL="0">
+              <a:lnSpc>
+                <a:spcPts val="2706"/>
+              </a:lnSpc>
+              <a:spcBef>
+                <a:spcPts val="800"/>
+              </a:spcBef>
+              <a:buNone/>
+            </a:pPr>
+            <a:r>
+              <a:rPr lang="en-US" sz="1866" dirty="0">
+                <a:solidFill>
+                  <a:srgbClr val="3D3528"/>
+                </a:solidFill>
+                <a:latin typeface="Work Sans" pitchFamily="34" charset="0"/>
+                <a:ea typeface="Work Sans" pitchFamily="34" charset="-122"/>
+                <a:cs typeface="Work Sans" pitchFamily="34" charset="-120"/>
+              </a:rPr>
+              <a:t>How long one person is reachable.</a:t>
+            </a:r>
+            <a:endParaRPr lang="en-US" sz="1866" dirty="0"/>
+          </a:p>
+        </p:txBody>
+      </p:sp>
+      <p:sp>
+        <p:nvSpPr>
+          <p:cNvPr id="10" name="Text 8"/>
+          <p:cNvSpPr/>
+          <p:nvPr/>
+        </p:nvSpPr>
+        <p:spPr>
+          <a:xfrm>
+            <a:off x="6263701" y="1977430"/>
+            <a:ext cx="4977354" cy="1218009"/>
+          </a:xfrm>
+          <a:prstGeom prst="roundRect">
+            <a:avLst>
+              <a:gd name="adj" fmla="val 12511"/>
+            </a:avLst>
+          </a:prstGeom>
+          <a:noFill/>
+          <a:ln w="12698">
+            <a:solidFill>
+              <a:srgbClr val="3D3528"/>
+            </a:solidFill>
+          </a:ln>
+        </p:spPr>
+        <p:txBody>
+          <a:bodyPr wrap="square" rtlCol="0" anchor="ctr"/>
+          <a:lstStyle/>
+          <a:p>
+            <a:pPr indent="0" marL="0">
+              <a:buNone/>
+            </a:pPr>
+            <a:endParaRPr lang="en-US" dirty="0"/>
+          </a:p>
+        </p:txBody>
+      </p:sp>
+      <p:sp>
+        <p:nvSpPr>
+          <p:cNvPr id="11" name="Text 9"/>
+          <p:cNvSpPr/>
+          <p:nvPr/>
+        </p:nvSpPr>
+        <p:spPr>
+          <a:xfrm>
+            <a:off x="6547197" y="2159397"/>
+            <a:ext cx="372374" cy="372467"/>
+          </a:xfrm>
+          <a:prstGeom prst="roundRect">
+            <a:avLst>
+              <a:gd name="adj" fmla="val 327372"/>
+            </a:avLst>
+          </a:prstGeom>
+          <a:solidFill>
+            <a:srgbClr val="C2693F"/>
+          </a:solidFill>
+          <a:ln/>
+        </p:spPr>
+        <p:txBody>
+          <a:bodyPr wrap="square" rtlCol="0" anchor="ctr"/>
+          <a:lstStyle/>
+          <a:p>
+            <a:pPr indent="0" marL="0">
+              <a:buNone/>
+            </a:pPr>
+            <a:endParaRPr lang="en-US" dirty="0"/>
+          </a:p>
+        </p:txBody>
+      </p:sp>
+      <p:sp>
+        <p:nvSpPr>
+          <p:cNvPr id="12" name="Text 10"/>
+          <p:cNvSpPr/>
+          <p:nvPr/>
+        </p:nvSpPr>
+        <p:spPr>
+          <a:xfrm>
+            <a:off x="6676149" y="2203450"/>
+            <a:ext cx="116557" cy="284361"/>
+          </a:xfrm>
+          <a:prstGeom prst="rect">
+            <a:avLst/>
+          </a:prstGeom>
+          <a:noFill/>
+          <a:ln/>
+        </p:spPr>
+        <p:txBody>
+          <a:bodyPr wrap="square" lIns="0" tIns="0" rIns="0" bIns="0" rtlCol="0" anchor="t"/>
+          <a:lstStyle/>
+          <a:p>
+            <a:pPr algn="l" indent="0" marL="0">
+              <a:lnSpc>
+                <a:spcPts val="2240"/>
+              </a:lnSpc>
+              <a:buNone/>
+            </a:pPr>
+            <a:r>
+              <a:rPr lang="en-US" sz="1600" b="1" dirty="0">
+                <a:solidFill>
+                  <a:srgbClr val="FBF7EF"/>
+                </a:solidFill>
+                <a:latin typeface="Work Sans" pitchFamily="34" charset="0"/>
+                <a:ea typeface="Work Sans" pitchFamily="34" charset="-122"/>
+                <a:cs typeface="Work Sans" pitchFamily="34" charset="-120"/>
+              </a:rPr>
+              <a:t>2</a:t>
+            </a:r>
+            <a:endParaRPr lang="en-US" sz="1600" dirty="0"/>
+          </a:p>
+        </p:txBody>
+      </p:sp>
+      <p:sp>
+        <p:nvSpPr>
+          <p:cNvPr id="13" name="Text 11"/>
+          <p:cNvSpPr/>
+          <p:nvPr/>
+        </p:nvSpPr>
+        <p:spPr>
+          <a:xfrm>
+            <a:off x="7054872" y="2162770"/>
+            <a:ext cx="1282125" cy="365522"/>
+          </a:xfrm>
+          <a:prstGeom prst="rect">
+            <a:avLst/>
+          </a:prstGeom>
+          <a:noFill/>
+          <a:ln/>
+        </p:spPr>
+        <p:txBody>
+          <a:bodyPr wrap="square" lIns="0" tIns="0" rIns="0" bIns="0" rtlCol="0" anchor="t"/>
+          <a:lstStyle/>
+          <a:p>
+            <a:pPr algn="l" indent="0" marL="0">
+              <a:lnSpc>
+                <a:spcPts val="2880"/>
+              </a:lnSpc>
+              <a:buNone/>
+            </a:pPr>
+            <a:r>
+              <a:rPr lang="en-US" sz="2133" dirty="0">
+                <a:solidFill>
+                  <a:srgbClr val="3D3528"/>
+                </a:solidFill>
+                <a:latin typeface="Work Sans" pitchFamily="34" charset="0"/>
+                <a:ea typeface="Work Sans" pitchFamily="34" charset="-122"/>
+                <a:cs typeface="Work Sans" pitchFamily="34" charset="-120"/>
+              </a:rPr>
+              <a:t>Handover</a:t>
+            </a:r>
+            <a:endParaRPr lang="en-US" sz="2133" dirty="0"/>
+          </a:p>
+        </p:txBody>
+      </p:sp>
+      <p:sp>
+        <p:nvSpPr>
+          <p:cNvPr id="14" name="Text 12"/>
+          <p:cNvSpPr/>
+          <p:nvPr/>
+        </p:nvSpPr>
+        <p:spPr>
+          <a:xfrm>
+            <a:off x="6547197" y="2633464"/>
+            <a:ext cx="4498568" cy="343694"/>
+          </a:xfrm>
+          <a:prstGeom prst="rect">
+            <a:avLst/>
+          </a:prstGeom>
+          <a:noFill/>
+          <a:ln/>
+        </p:spPr>
+        <p:txBody>
+          <a:bodyPr wrap="square" lIns="0" tIns="0" rIns="0" bIns="0" rtlCol="0" anchor="t"/>
+          <a:lstStyle/>
+          <a:p>
+            <a:pPr algn="l" indent="0" marL="0">
+              <a:lnSpc>
+                <a:spcPts val="2706"/>
+              </a:lnSpc>
+              <a:spcBef>
+                <a:spcPts val="800"/>
+              </a:spcBef>
+              <a:buNone/>
+            </a:pPr>
+            <a:r>
+              <a:rPr lang="en-US" sz="1866" dirty="0">
+                <a:solidFill>
+                  <a:srgbClr val="3D3528"/>
+                </a:solidFill>
+                <a:latin typeface="Work Sans" pitchFamily="34" charset="0"/>
+                <a:ea typeface="Work Sans" pitchFamily="34" charset="-122"/>
+                <a:cs typeface="Work Sans" pitchFamily="34" charset="-120"/>
+              </a:rPr>
+              <a:t>What moves at the change of shift.</a:t>
+            </a:r>
+            <a:endParaRPr lang="en-US" sz="1866" dirty="0"/>
+          </a:p>
+        </p:txBody>
+      </p:sp>
+      <p:sp>
+        <p:nvSpPr>
+          <p:cNvPr id="15" name="Text 13"/>
+          <p:cNvSpPr/>
+          <p:nvPr/>
+        </p:nvSpPr>
+        <p:spPr>
+          <a:xfrm>
+            <a:off x="947897" y="3466306"/>
+            <a:ext cx="4977354" cy="1218208"/>
+          </a:xfrm>
+          <a:prstGeom prst="roundRect">
+            <a:avLst>
+              <a:gd name="adj" fmla="val 12509"/>
+            </a:avLst>
+          </a:prstGeom>
+          <a:noFill/>
+          <a:ln w="12698">
+            <a:solidFill>
+              <a:srgbClr val="3D3528"/>
+            </a:solidFill>
+          </a:ln>
+        </p:spPr>
+        <p:txBody>
+          <a:bodyPr wrap="square" rtlCol="0" anchor="ctr"/>
+          <a:lstStyle/>
+          <a:p>
+            <a:pPr indent="0" marL="0">
+              <a:buNone/>
+            </a:pPr>
+            <a:endParaRPr lang="en-US" dirty="0"/>
+          </a:p>
+        </p:txBody>
+      </p:sp>
+      <p:sp>
+        <p:nvSpPr>
+          <p:cNvPr id="16" name="Text 14"/>
+          <p:cNvSpPr/>
+          <p:nvPr/>
+        </p:nvSpPr>
+        <p:spPr>
+          <a:xfrm>
+            <a:off x="1231394" y="3648273"/>
+            <a:ext cx="372374" cy="372467"/>
+          </a:xfrm>
+          <a:prstGeom prst="roundRect">
+            <a:avLst>
+              <a:gd name="adj" fmla="val 327372"/>
+            </a:avLst>
+          </a:prstGeom>
+          <a:solidFill>
+            <a:srgbClr val="C2693F"/>
+          </a:solidFill>
+          <a:ln/>
+        </p:spPr>
+        <p:txBody>
+          <a:bodyPr wrap="square" rtlCol="0" anchor="ctr"/>
+          <a:lstStyle/>
+          <a:p>
+            <a:pPr indent="0" marL="0">
+              <a:buNone/>
+            </a:pPr>
+            <a:endParaRPr lang="en-US" dirty="0"/>
+          </a:p>
+        </p:txBody>
+      </p:sp>
+      <p:sp>
+        <p:nvSpPr>
+          <p:cNvPr id="17" name="Text 15"/>
+          <p:cNvSpPr/>
+          <p:nvPr/>
+        </p:nvSpPr>
+        <p:spPr>
+          <a:xfrm>
+            <a:off x="1360346" y="3692327"/>
+            <a:ext cx="116557" cy="284361"/>
+          </a:xfrm>
+          <a:prstGeom prst="rect">
+            <a:avLst/>
+          </a:prstGeom>
+          <a:noFill/>
+          <a:ln/>
+        </p:spPr>
+        <p:txBody>
+          <a:bodyPr wrap="square" lIns="0" tIns="0" rIns="0" bIns="0" rtlCol="0" anchor="t"/>
+          <a:lstStyle/>
+          <a:p>
+            <a:pPr algn="l" indent="0" marL="0">
+              <a:lnSpc>
+                <a:spcPts val="2240"/>
+              </a:lnSpc>
+              <a:buNone/>
+            </a:pPr>
+            <a:r>
+              <a:rPr lang="en-US" sz="1600" b="1" dirty="0">
+                <a:solidFill>
+                  <a:srgbClr val="FBF7EF"/>
+                </a:solidFill>
+                <a:latin typeface="Work Sans" pitchFamily="34" charset="0"/>
+                <a:ea typeface="Work Sans" pitchFamily="34" charset="-122"/>
+                <a:cs typeface="Work Sans" pitchFamily="34" charset="-120"/>
+              </a:rPr>
+              <a:t>3</a:t>
+            </a:r>
+            <a:endParaRPr lang="en-US" sz="1600" dirty="0"/>
+          </a:p>
+        </p:txBody>
+      </p:sp>
+      <p:sp>
+        <p:nvSpPr>
+          <p:cNvPr id="18" name="Text 16"/>
+          <p:cNvSpPr/>
+          <p:nvPr/>
+        </p:nvSpPr>
+        <p:spPr>
+          <a:xfrm>
+            <a:off x="1739068" y="3651647"/>
+            <a:ext cx="1942614" cy="365522"/>
+          </a:xfrm>
+          <a:prstGeom prst="rect">
+            <a:avLst/>
+          </a:prstGeom>
+          <a:noFill/>
+          <a:ln/>
+        </p:spPr>
+        <p:txBody>
+          <a:bodyPr wrap="square" lIns="0" tIns="0" rIns="0" bIns="0" rtlCol="0" anchor="t"/>
+          <a:lstStyle/>
+          <a:p>
+            <a:pPr algn="l" indent="0" marL="0">
+              <a:lnSpc>
+                <a:spcPts val="2880"/>
+              </a:lnSpc>
+              <a:buNone/>
+            </a:pPr>
+            <a:r>
+              <a:rPr lang="en-US" sz="2133" dirty="0">
+                <a:solidFill>
+                  <a:srgbClr val="3D3528"/>
+                </a:solidFill>
+                <a:latin typeface="Work Sans" pitchFamily="34" charset="0"/>
+                <a:ea typeface="Work Sans" pitchFamily="34" charset="-122"/>
+                <a:cs typeface="Work Sans" pitchFamily="34" charset="-120"/>
+              </a:rPr>
+              <a:t>Compensation</a:t>
+            </a:r>
+            <a:endParaRPr lang="en-US" sz="2133" dirty="0"/>
+          </a:p>
+        </p:txBody>
+      </p:sp>
+      <p:sp>
+        <p:nvSpPr>
+          <p:cNvPr id="19" name="Text 17"/>
+          <p:cNvSpPr/>
+          <p:nvPr/>
+        </p:nvSpPr>
+        <p:spPr>
+          <a:xfrm>
+            <a:off x="1231394" y="4122341"/>
+            <a:ext cx="4498568" cy="343694"/>
+          </a:xfrm>
+          <a:prstGeom prst="rect">
+            <a:avLst/>
+          </a:prstGeom>
+          <a:noFill/>
+          <a:ln/>
+        </p:spPr>
+        <p:txBody>
+          <a:bodyPr wrap="square" lIns="0" tIns="0" rIns="0" bIns="0" rtlCol="0" anchor="t"/>
+          <a:lstStyle/>
+          <a:p>
+            <a:pPr algn="l" indent="0" marL="0">
+              <a:lnSpc>
+                <a:spcPts val="2706"/>
+              </a:lnSpc>
+              <a:spcBef>
+                <a:spcPts val="800"/>
+              </a:spcBef>
+              <a:buNone/>
+            </a:pPr>
+            <a:r>
+              <a:rPr lang="en-US" sz="1866" dirty="0">
+                <a:solidFill>
+                  <a:srgbClr val="3D3528"/>
+                </a:solidFill>
+                <a:latin typeface="Work Sans" pitchFamily="34" charset="0"/>
+                <a:ea typeface="Work Sans" pitchFamily="34" charset="-122"/>
+                <a:cs typeface="Work Sans" pitchFamily="34" charset="-120"/>
+              </a:rPr>
+              <a:t>What the hours cost to schedule.</a:t>
+            </a:r>
+            <a:endParaRPr lang="en-US" sz="1866" dirty="0"/>
+          </a:p>
+        </p:txBody>
+      </p:sp>
+      <p:sp>
+        <p:nvSpPr>
+          <p:cNvPr id="20" name="Text 18"/>
+          <p:cNvSpPr/>
+          <p:nvPr/>
+        </p:nvSpPr>
+        <p:spPr>
+          <a:xfrm>
+            <a:off x="6263701" y="3466306"/>
+            <a:ext cx="4977354" cy="1218208"/>
+          </a:xfrm>
+          <a:prstGeom prst="roundRect">
+            <a:avLst>
+              <a:gd name="adj" fmla="val 12509"/>
+            </a:avLst>
+          </a:prstGeom>
+          <a:noFill/>
+          <a:ln w="12698">
+            <a:solidFill>
+              <a:srgbClr val="3D3528"/>
+            </a:solidFill>
+          </a:ln>
+        </p:spPr>
+        <p:txBody>
+          <a:bodyPr wrap="square" rtlCol="0" anchor="ctr"/>
+          <a:lstStyle/>
+          <a:p>
+            <a:pPr indent="0" marL="0">
+              <a:buNone/>
+            </a:pPr>
+            <a:endParaRPr lang="en-US" dirty="0"/>
+          </a:p>
+        </p:txBody>
+      </p:sp>
+      <p:sp>
+        <p:nvSpPr>
+          <p:cNvPr id="21" name="Text 19"/>
+          <p:cNvSpPr/>
+          <p:nvPr/>
+        </p:nvSpPr>
+        <p:spPr>
+          <a:xfrm>
+            <a:off x="6547197" y="3648273"/>
+            <a:ext cx="372374" cy="372467"/>
+          </a:xfrm>
+          <a:prstGeom prst="roundRect">
+            <a:avLst>
+              <a:gd name="adj" fmla="val 327372"/>
+            </a:avLst>
+          </a:prstGeom>
+          <a:solidFill>
+            <a:srgbClr val="C2693F"/>
+          </a:solidFill>
+          <a:ln/>
+        </p:spPr>
+        <p:txBody>
+          <a:bodyPr wrap="square" rtlCol="0" anchor="ctr"/>
+          <a:lstStyle/>
+          <a:p>
+            <a:pPr indent="0" marL="0">
+              <a:buNone/>
+            </a:pPr>
+            <a:endParaRPr lang="en-US" dirty="0"/>
+          </a:p>
+        </p:txBody>
+      </p:sp>
+      <p:sp>
+        <p:nvSpPr>
+          <p:cNvPr id="22" name="Text 20"/>
+          <p:cNvSpPr/>
+          <p:nvPr/>
+        </p:nvSpPr>
+        <p:spPr>
+          <a:xfrm>
+            <a:off x="6669801" y="3692327"/>
+            <a:ext cx="129508" cy="284361"/>
+          </a:xfrm>
+          <a:prstGeom prst="rect">
+            <a:avLst/>
+          </a:prstGeom>
+          <a:noFill/>
+          <a:ln/>
+        </p:spPr>
+        <p:txBody>
+          <a:bodyPr wrap="square" lIns="0" tIns="0" rIns="0" bIns="0" rtlCol="0" anchor="t"/>
+          <a:lstStyle/>
+          <a:p>
+            <a:pPr algn="l" indent="0" marL="0">
+              <a:lnSpc>
+                <a:spcPts val="2240"/>
+              </a:lnSpc>
+              <a:buNone/>
+            </a:pPr>
+            <a:r>
+              <a:rPr lang="en-US" sz="1600" b="1" dirty="0">
+                <a:solidFill>
+                  <a:srgbClr val="FBF7EF"/>
+                </a:solidFill>
+                <a:latin typeface="Work Sans" pitchFamily="34" charset="0"/>
+                <a:ea typeface="Work Sans" pitchFamily="34" charset="-122"/>
+                <a:cs typeface="Work Sans" pitchFamily="34" charset="-120"/>
+              </a:rPr>
+              <a:t>4</a:t>
+            </a:r>
+            <a:endParaRPr lang="en-US" sz="1600" dirty="0"/>
+          </a:p>
+        </p:txBody>
+      </p:sp>
+      <p:sp>
+        <p:nvSpPr>
+          <p:cNvPr id="23" name="Text 21"/>
+          <p:cNvSpPr/>
+          <p:nvPr/>
+        </p:nvSpPr>
+        <p:spPr>
+          <a:xfrm>
+            <a:off x="7054872" y="3651647"/>
+            <a:ext cx="3211789" cy="365522"/>
+          </a:xfrm>
+          <a:prstGeom prst="rect">
+            <a:avLst/>
+          </a:prstGeom>
+          <a:noFill/>
+          <a:ln/>
+        </p:spPr>
+        <p:txBody>
+          <a:bodyPr wrap="square" lIns="0" tIns="0" rIns="0" bIns="0" rtlCol="0" anchor="t"/>
+          <a:lstStyle/>
+          <a:p>
+            <a:pPr algn="l" indent="0" marL="0">
+              <a:lnSpc>
+                <a:spcPts val="2880"/>
+              </a:lnSpc>
+              <a:buNone/>
+            </a:pPr>
+            <a:r>
+              <a:rPr lang="en-US" sz="2133" dirty="0">
+                <a:solidFill>
+                  <a:srgbClr val="3D3528"/>
+                </a:solidFill>
+                <a:latin typeface="Work Sans" pitchFamily="34" charset="0"/>
+                <a:ea typeface="Work Sans" pitchFamily="34" charset="-122"/>
+                <a:cs typeface="Work Sans" pitchFamily="34" charset="-120"/>
+              </a:rPr>
+              <a:t>A ceiling on night pages</a:t>
+            </a:r>
+            <a:endParaRPr lang="en-US" sz="2133" dirty="0"/>
+          </a:p>
+        </p:txBody>
+      </p:sp>
+      <p:sp>
+        <p:nvSpPr>
+          <p:cNvPr id="24" name="Text 22"/>
+          <p:cNvSpPr/>
+          <p:nvPr/>
+        </p:nvSpPr>
+        <p:spPr>
+          <a:xfrm>
+            <a:off x="6547197" y="4122341"/>
+            <a:ext cx="4498568" cy="343694"/>
+          </a:xfrm>
+          <a:prstGeom prst="rect">
+            <a:avLst/>
+          </a:prstGeom>
+          <a:noFill/>
+          <a:ln/>
+        </p:spPr>
+        <p:txBody>
+          <a:bodyPr wrap="square" lIns="0" tIns="0" rIns="0" bIns="0" rtlCol="0" anchor="t"/>
+          <a:lstStyle/>
+          <a:p>
+            <a:pPr algn="l" indent="0" marL="0">
+              <a:lnSpc>
+                <a:spcPts val="2706"/>
+              </a:lnSpc>
+              <a:spcBef>
+                <a:spcPts val="800"/>
+              </a:spcBef>
+              <a:buNone/>
+            </a:pPr>
+            <a:r>
+              <a:rPr lang="en-US" sz="1866" dirty="0">
+                <a:solidFill>
+                  <a:srgbClr val="3D3528"/>
+                </a:solidFill>
+                <a:latin typeface="Work Sans" pitchFamily="34" charset="0"/>
+                <a:ea typeface="Work Sans" pitchFamily="34" charset="-122"/>
+                <a:cs typeface="Work Sans" pitchFamily="34" charset="-120"/>
+              </a:rPr>
+              <a:t>A limit the rota may not exceed.</a:t>
+            </a:r>
+            <a:endParaRPr lang="en-US" sz="1866" dirty="0"/>
+          </a:p>
+        </p:txBody>
+      </p:sp>
+      <p:sp>
+        <p:nvSpPr>
+          <p:cNvPr id="25" name="Text 23"/>
+          <p:cNvSpPr/>
+          <p:nvPr/>
+        </p:nvSpPr>
+        <p:spPr>
+          <a:xfrm>
+            <a:off x="947897" y="4955381"/>
+            <a:ext cx="10293157" cy="16867"/>
+          </a:xfrm>
+          <a:prstGeom prst="rect">
+            <a:avLst/>
+          </a:prstGeom>
+          <a:solidFill>
+            <a:srgbClr val="C2693F"/>
+          </a:solidFill>
+          <a:ln/>
+        </p:spPr>
+        <p:txBody>
+          <a:bodyPr wrap="square" rtlCol="0" anchor="ctr"/>
+          <a:lstStyle/>
+          <a:p>
+            <a:pPr indent="0" marL="0">
+              <a:buNone/>
+            </a:pPr>
+            <a:endParaRPr lang="en-US" dirty="0"/>
+          </a:p>
+        </p:txBody>
+      </p:sp>
+      <p:sp>
+        <p:nvSpPr>
+          <p:cNvPr id="26" name="Text 24"/>
+          <p:cNvSpPr/>
+          <p:nvPr/>
+        </p:nvSpPr>
+        <p:spPr>
+          <a:xfrm>
+            <a:off x="947897" y="5141516"/>
+            <a:ext cx="10499020" cy="406202"/>
+          </a:xfrm>
+          <a:prstGeom prst="rect">
+            <a:avLst/>
+          </a:prstGeom>
+          <a:noFill/>
+          <a:ln/>
+        </p:spPr>
+        <p:txBody>
+          <a:bodyPr wrap="square" lIns="0" tIns="0" rIns="0" bIns="0" rtlCol="0" anchor="t"/>
+          <a:lstStyle/>
+          <a:p>
+            <a:pPr algn="l" indent="0" marL="0">
+              <a:lnSpc>
+                <a:spcPts val="3200"/>
+              </a:lnSpc>
+              <a:spcBef>
+                <a:spcPts val="1333"/>
+              </a:spcBef>
+              <a:buNone/>
+            </a:pPr>
+            <a:r>
+              <a:rPr lang="en-US" sz="2133" dirty="0">
+                <a:solidFill>
+                  <a:srgbClr val="3D3528"/>
+                </a:solidFill>
+                <a:latin typeface="Work Sans" pitchFamily="34" charset="0"/>
+                <a:ea typeface="Work Sans" pitchFamily="34" charset="-122"/>
+                <a:cs typeface="Work Sans" pitchFamily="34" charset="-120"/>
+              </a:rPr>
+              <a:t>Encouragement moves none of them. Only the roster does.</a:t>
+            </a:r>
+            <a:endParaRPr lang="en-US" sz="2133" dirty="0"/>
+          </a:p>
+        </p:txBody>
+      </p:sp>
+      <p:sp>
+        <p:nvSpPr>
+          <p:cNvPr id="27" name="Text 25"/>
+          <p:cNvSpPr/>
+          <p:nvPr/>
+        </p:nvSpPr>
+        <p:spPr>
+          <a:xfrm>
+            <a:off x="947897" y="5784652"/>
+            <a:ext cx="10293157" cy="16867"/>
+          </a:xfrm>
+          <a:prstGeom prst="rect">
+            <a:avLst/>
+          </a:prstGeom>
+          <a:solidFill>
+            <a:srgbClr val="D6CCB8"/>
+          </a:solidFill>
+          <a:ln/>
+        </p:spPr>
+        <p:txBody>
+          <a:bodyPr wrap="square" rtlCol="0" anchor="ctr"/>
+          <a:lstStyle/>
+          <a:p>
+            <a:pPr indent="0" marL="0">
+              <a:buNone/>
+            </a:pPr>
+            <a:endParaRPr lang="en-US" dirty="0"/>
+          </a:p>
+        </p:txBody>
+      </p:sp>
+      <p:sp>
+        <p:nvSpPr>
+          <p:cNvPr id="28" name="Text 26"/>
+          <p:cNvSpPr/>
+          <p:nvPr/>
+        </p:nvSpPr>
+        <p:spPr>
+          <a:xfrm>
+            <a:off x="947897" y="5919986"/>
+            <a:ext cx="10499020" cy="260747"/>
+          </a:xfrm>
+          <a:prstGeom prst="rect">
+            <a:avLst/>
+          </a:prstGeom>
+          <a:noFill/>
+          <a:ln/>
+        </p:spPr>
+        <p:txBody>
+          <a:bodyPr wrap="square" lIns="0" tIns="0" rIns="0" bIns="0" rtlCol="0" anchor="t"/>
+          <a:lstStyle/>
+          <a:p>
+            <a:pPr algn="l" indent="0" marL="0">
+              <a:lnSpc>
+                <a:spcPts val="2053"/>
+              </a:lnSpc>
+              <a:spcBef>
+                <a:spcPts val="933"/>
+              </a:spcBef>
+              <a:buNone/>
+            </a:pPr>
+            <a:r>
+              <a:rPr lang="en-US" sz="1466" dirty="0">
+                <a:solidFill>
+                  <a:srgbClr val="3D3528"/>
+                </a:solidFill>
+                <a:latin typeface="Work Sans" pitchFamily="34" charset="0"/>
+                <a:ea typeface="Work Sans" pitchFamily="34" charset="-122"/>
+                <a:cs typeface="Work Sans" pitchFamily="34" charset="-120"/>
+              </a:rPr>
+              <a:t>No sourced figures: shift hours, page rates and roster sizes are unsourced.</a:t>
+            </a:r>
+            <a:endParaRPr lang="en-US" sz="1466" dirty="0"/>
+          </a:p>
+        </p:txBody>
+      </p:sp>
     </p:spTree>
   </p:cSld>
   <p:clrMapOvr>
@@ -1308,6 +2721,13 @@
 <file path=ppt/slides/slide3.xml><?xml version="1.0" encoding="utf-8"?>
 <p:sld xmlns:a="http://schemas.openxmlformats.org/drawingml/2006/main" xmlns:r="http://schemas.openxmlformats.org/officeDocument/2006/relationships" xmlns:p="http://schemas.openxmlformats.org/presentationml/2006/main">
   <p:cSld name="Slide 3">
+    <p:bg>
+      <p:bgPr>
+        <a:solidFill>
+          <a:srgbClr val="F2EBDF"/>
+        </a:solidFill>
+      </p:bgPr>
+    </p:bg>
     <p:spTree>
       <p:nvGrpSpPr>
         <p:cNvPr id="1" name=""/>
@@ -1322,30 +2742,810 @@
           <a:chExt cx="0" cy="0"/>
         </a:xfrm>
       </p:grpSpPr>
-      <p:pic>
-        <p:nvPicPr>
-          <p:cNvPr id="2" name="Image 0" descr="/tmp/slide-1787840551094-dh2wjjunqau.png">    </p:cNvPr>
-          <p:cNvPicPr>
-            <a:picLocks noChangeAspect="1"/>
-          </p:cNvPicPr>
-          <p:nvPr/>
-        </p:nvPicPr>
-        <p:blipFill>
-          <a:blip r:embed="rId1"/>
-          <a:stretch>
-            <a:fillRect/>
-          </a:stretch>
-        </p:blipFill>
-        <p:spPr>
-          <a:xfrm>
-            <a:off x="0" y="0"/>
-            <a:ext cx="12188952" cy="6858000"/>
-          </a:xfrm>
-          <a:prstGeom prst="rect">
-            <a:avLst/>
-          </a:prstGeom>
-        </p:spPr>
-      </p:pic>
+      <p:sp>
+        <p:nvSpPr>
+          <p:cNvPr id="2" name="Text 0"/>
+          <p:cNvSpPr/>
+          <p:nvPr/>
+        </p:nvSpPr>
+        <p:spPr>
+          <a:xfrm>
+            <a:off x="947897" y="677267"/>
+            <a:ext cx="1311265" cy="284361"/>
+          </a:xfrm>
+          <a:prstGeom prst="rect">
+            <a:avLst/>
+          </a:prstGeom>
+          <a:noFill/>
+          <a:ln/>
+        </p:spPr>
+        <p:txBody>
+          <a:bodyPr wrap="square" lIns="0" tIns="0" rIns="0" bIns="0" rtlCol="0" anchor="t"/>
+          <a:lstStyle/>
+          <a:p>
+            <a:pPr algn="l" indent="0" marL="0">
+              <a:lnSpc>
+                <a:spcPts val="2240"/>
+              </a:lnSpc>
+              <a:buNone/>
+            </a:pPr>
+            <a:r>
+              <a:rPr lang="en-US" sz="1600" b="1" dirty="0">
+                <a:solidFill>
+                  <a:srgbClr val="C2693F"/>
+                </a:solidFill>
+                <a:latin typeface="Work Sans" pitchFamily="34" charset="0"/>
+                <a:ea typeface="Work Sans" pitchFamily="34" charset="-122"/>
+                <a:cs typeface="Work Sans" pitchFamily="34" charset="-120"/>
+              </a:rPr>
+              <a:t>HANDOVER</a:t>
+            </a:r>
+            <a:endParaRPr lang="en-US" sz="1600" dirty="0"/>
+          </a:p>
+        </p:txBody>
+      </p:sp>
+      <p:sp>
+        <p:nvSpPr>
+          <p:cNvPr id="3" name="Text 1"/>
+          <p:cNvSpPr/>
+          <p:nvPr/>
+        </p:nvSpPr>
+        <p:spPr>
+          <a:xfrm>
+            <a:off x="10428855" y="677267"/>
+            <a:ext cx="828444" cy="284361"/>
+          </a:xfrm>
+          <a:prstGeom prst="rect">
+            <a:avLst/>
+          </a:prstGeom>
+          <a:noFill/>
+          <a:ln/>
+        </p:spPr>
+        <p:txBody>
+          <a:bodyPr wrap="square" lIns="0" tIns="0" rIns="0" bIns="0" rtlCol="0" anchor="t"/>
+          <a:lstStyle/>
+          <a:p>
+            <a:pPr algn="l" indent="0" marL="0">
+              <a:lnSpc>
+                <a:spcPts val="2240"/>
+              </a:lnSpc>
+              <a:buNone/>
+            </a:pPr>
+            <a:r>
+              <a:rPr lang="en-US" sz="1600" b="1" dirty="0">
+                <a:solidFill>
+                  <a:srgbClr val="8A8170"/>
+                </a:solidFill>
+                <a:latin typeface="Work Sans" pitchFamily="34" charset="0"/>
+                <a:ea typeface="Work Sans" pitchFamily="34" charset="-122"/>
+                <a:cs typeface="Work Sans" pitchFamily="34" charset="-120"/>
+              </a:rPr>
+              <a:t>03 / 05</a:t>
+            </a:r>
+            <a:endParaRPr lang="en-US" sz="1600" dirty="0"/>
+          </a:p>
+        </p:txBody>
+      </p:sp>
+      <p:sp>
+        <p:nvSpPr>
+          <p:cNvPr id="4" name="Text 2"/>
+          <p:cNvSpPr/>
+          <p:nvPr/>
+        </p:nvSpPr>
+        <p:spPr>
+          <a:xfrm>
+            <a:off x="947897" y="1198563"/>
+            <a:ext cx="10499020" cy="609600"/>
+          </a:xfrm>
+          <a:prstGeom prst="rect">
+            <a:avLst/>
+          </a:prstGeom>
+          <a:noFill/>
+          <a:ln/>
+        </p:spPr>
+        <p:txBody>
+          <a:bodyPr wrap="square" lIns="0" tIns="0" rIns="0" bIns="0" rtlCol="0" anchor="t"/>
+          <a:lstStyle/>
+          <a:p>
+            <a:pPr algn="l" indent="0" marL="0">
+              <a:lnSpc>
+                <a:spcPts val="4799"/>
+              </a:lnSpc>
+              <a:spcAft>
+                <a:spcPts val="1600"/>
+              </a:spcAft>
+              <a:buNone/>
+            </a:pPr>
+            <a:r>
+              <a:rPr lang="en-US" sz="3999" dirty="0">
+                <a:solidFill>
+                  <a:srgbClr val="3D3528"/>
+                </a:solidFill>
+                <a:latin typeface="Work Sans" pitchFamily="34" charset="0"/>
+                <a:ea typeface="Work Sans" pitchFamily="34" charset="-122"/>
+                <a:cs typeface="Work Sans" pitchFamily="34" charset="-120"/>
+              </a:rPr>
+              <a:t>What a handover has to carry</a:t>
+            </a:r>
+            <a:endParaRPr lang="en-US" sz="3999" dirty="0"/>
+          </a:p>
+        </p:txBody>
+      </p:sp>
+      <p:sp>
+        <p:nvSpPr>
+          <p:cNvPr id="5" name="Text 3"/>
+          <p:cNvSpPr/>
+          <p:nvPr/>
+        </p:nvSpPr>
+        <p:spPr>
+          <a:xfrm>
+            <a:off x="947897" y="2011363"/>
+            <a:ext cx="5180305" cy="284361"/>
+          </a:xfrm>
+          <a:prstGeom prst="rect">
+            <a:avLst/>
+          </a:prstGeom>
+          <a:noFill/>
+          <a:ln/>
+        </p:spPr>
+        <p:txBody>
+          <a:bodyPr wrap="square" lIns="0" tIns="0" rIns="0" bIns="0" rtlCol="0" anchor="t"/>
+          <a:lstStyle/>
+          <a:p>
+            <a:pPr algn="l" indent="0" marL="0">
+              <a:lnSpc>
+                <a:spcPts val="2240"/>
+              </a:lnSpc>
+              <a:spcAft>
+                <a:spcPts val="1333"/>
+              </a:spcAft>
+              <a:buNone/>
+            </a:pPr>
+            <a:r>
+              <a:rPr lang="en-US" sz="1600" b="1" dirty="0">
+                <a:solidFill>
+                  <a:srgbClr val="C2693F"/>
+                </a:solidFill>
+                <a:latin typeface="Work Sans" pitchFamily="34" charset="0"/>
+                <a:ea typeface="Work Sans" pitchFamily="34" charset="-122"/>
+                <a:cs typeface="Work Sans" pitchFamily="34" charset="-120"/>
+              </a:rPr>
+              <a:t>THE PAYLOAD</a:t>
+            </a:r>
+            <a:endParaRPr lang="en-US" sz="1600" dirty="0"/>
+          </a:p>
+        </p:txBody>
+      </p:sp>
+      <p:sp>
+        <p:nvSpPr>
+          <p:cNvPr id="6" name="Shape 4"/>
+          <p:cNvSpPr/>
+          <p:nvPr/>
+        </p:nvSpPr>
+        <p:spPr>
+          <a:xfrm>
+            <a:off x="947897" y="2916634"/>
+            <a:ext cx="5078730" cy="0"/>
+          </a:xfrm>
+          <a:prstGeom prst="line">
+            <a:avLst/>
+          </a:prstGeom>
+          <a:noFill/>
+          <a:ln w="12698">
+            <a:solidFill>
+              <a:srgbClr val="D6CCB8"/>
+            </a:solidFill>
+            <a:prstDash val="solid"/>
+          </a:ln>
+        </p:spPr>
+      </p:sp>
+      <p:sp>
+        <p:nvSpPr>
+          <p:cNvPr id="7" name="Text 5"/>
+          <p:cNvSpPr/>
+          <p:nvPr/>
+        </p:nvSpPr>
+        <p:spPr>
+          <a:xfrm>
+            <a:off x="947897" y="2464991"/>
+            <a:ext cx="5180305" cy="343694"/>
+          </a:xfrm>
+          <a:prstGeom prst="rect">
+            <a:avLst/>
+          </a:prstGeom>
+          <a:noFill/>
+          <a:ln/>
+        </p:spPr>
+        <p:txBody>
+          <a:bodyPr wrap="square" lIns="0" tIns="0" rIns="0" bIns="0" rtlCol="0" anchor="t"/>
+          <a:lstStyle/>
+          <a:p>
+            <a:pPr algn="l" indent="0" marL="0">
+              <a:lnSpc>
+                <a:spcPts val="2706"/>
+              </a:lnSpc>
+              <a:buNone/>
+            </a:pPr>
+            <a:r>
+              <a:rPr lang="en-US" sz="1866" dirty="0">
+                <a:solidFill>
+                  <a:srgbClr val="3D3528"/>
+                </a:solidFill>
+                <a:latin typeface="Work Sans" pitchFamily="34" charset="0"/>
+                <a:ea typeface="Work Sans" pitchFamily="34" charset="-122"/>
+                <a:cs typeface="Work Sans" pitchFamily="34" charset="-120"/>
+              </a:rPr>
+              <a:t>Open incidents and the live hypothesis</a:t>
+            </a:r>
+            <a:endParaRPr lang="en-US" sz="1866" dirty="0"/>
+          </a:p>
+        </p:txBody>
+      </p:sp>
+      <p:sp>
+        <p:nvSpPr>
+          <p:cNvPr id="8" name="Shape 6"/>
+          <p:cNvSpPr/>
+          <p:nvPr/>
+        </p:nvSpPr>
+        <p:spPr>
+          <a:xfrm>
+            <a:off x="947897" y="3476228"/>
+            <a:ext cx="5078730" cy="0"/>
+          </a:xfrm>
+          <a:prstGeom prst="line">
+            <a:avLst/>
+          </a:prstGeom>
+          <a:noFill/>
+          <a:ln w="12698">
+            <a:solidFill>
+              <a:srgbClr val="D6CCB8"/>
+            </a:solidFill>
+            <a:prstDash val="solid"/>
+          </a:ln>
+        </p:spPr>
+      </p:sp>
+      <p:sp>
+        <p:nvSpPr>
+          <p:cNvPr id="9" name="Text 7"/>
+          <p:cNvSpPr/>
+          <p:nvPr/>
+        </p:nvSpPr>
+        <p:spPr>
+          <a:xfrm>
+            <a:off x="947897" y="3024584"/>
+            <a:ext cx="5180305" cy="343694"/>
+          </a:xfrm>
+          <a:prstGeom prst="rect">
+            <a:avLst/>
+          </a:prstGeom>
+          <a:noFill/>
+          <a:ln/>
+        </p:spPr>
+        <p:txBody>
+          <a:bodyPr wrap="square" lIns="0" tIns="0" rIns="0" bIns="0" rtlCol="0" anchor="t"/>
+          <a:lstStyle/>
+          <a:p>
+            <a:pPr algn="l" indent="0" marL="0">
+              <a:lnSpc>
+                <a:spcPts val="2706"/>
+              </a:lnSpc>
+              <a:buNone/>
+            </a:pPr>
+            <a:r>
+              <a:rPr lang="en-US" sz="1866" dirty="0">
+                <a:solidFill>
+                  <a:srgbClr val="3D3528"/>
+                </a:solidFill>
+                <a:latin typeface="Work Sans" pitchFamily="34" charset="0"/>
+                <a:ea typeface="Work Sans" pitchFamily="34" charset="-122"/>
+                <a:cs typeface="Work Sans" pitchFamily="34" charset="-120"/>
+              </a:rPr>
+              <a:t>What was tried and already ruled out</a:t>
+            </a:r>
+            <a:endParaRPr lang="en-US" sz="1866" dirty="0"/>
+          </a:p>
+        </p:txBody>
+      </p:sp>
+      <p:sp>
+        <p:nvSpPr>
+          <p:cNvPr id="10" name="Shape 8"/>
+          <p:cNvSpPr/>
+          <p:nvPr/>
+        </p:nvSpPr>
+        <p:spPr>
+          <a:xfrm>
+            <a:off x="947897" y="4035822"/>
+            <a:ext cx="5078730" cy="0"/>
+          </a:xfrm>
+          <a:prstGeom prst="line">
+            <a:avLst/>
+          </a:prstGeom>
+          <a:noFill/>
+          <a:ln w="12698">
+            <a:solidFill>
+              <a:srgbClr val="D6CCB8"/>
+            </a:solidFill>
+            <a:prstDash val="solid"/>
+          </a:ln>
+        </p:spPr>
+      </p:sp>
+      <p:sp>
+        <p:nvSpPr>
+          <p:cNvPr id="11" name="Text 9"/>
+          <p:cNvSpPr/>
+          <p:nvPr/>
+        </p:nvSpPr>
+        <p:spPr>
+          <a:xfrm>
+            <a:off x="947897" y="3584178"/>
+            <a:ext cx="5180305" cy="343694"/>
+          </a:xfrm>
+          <a:prstGeom prst="rect">
+            <a:avLst/>
+          </a:prstGeom>
+          <a:noFill/>
+          <a:ln/>
+        </p:spPr>
+        <p:txBody>
+          <a:bodyPr wrap="square" lIns="0" tIns="0" rIns="0" bIns="0" rtlCol="0" anchor="t"/>
+          <a:lstStyle/>
+          <a:p>
+            <a:pPr algn="l" indent="0" marL="0">
+              <a:lnSpc>
+                <a:spcPts val="2706"/>
+              </a:lnSpc>
+              <a:buNone/>
+            </a:pPr>
+            <a:r>
+              <a:rPr lang="en-US" sz="1866" dirty="0">
+                <a:solidFill>
+                  <a:srgbClr val="3D3528"/>
+                </a:solidFill>
+                <a:latin typeface="Work Sans" pitchFamily="34" charset="0"/>
+                <a:ea typeface="Work Sans" pitchFamily="34" charset="-122"/>
+                <a:cs typeface="Work Sans" pitchFamily="34" charset="-120"/>
+              </a:rPr>
+              <a:t>What is silenced, and when it returns</a:t>
+            </a:r>
+            <a:endParaRPr lang="en-US" sz="1866" dirty="0"/>
+          </a:p>
+        </p:txBody>
+      </p:sp>
+      <p:sp>
+        <p:nvSpPr>
+          <p:cNvPr id="12" name="Shape 10"/>
+          <p:cNvSpPr/>
+          <p:nvPr/>
+        </p:nvSpPr>
+        <p:spPr>
+          <a:xfrm>
+            <a:off x="947897" y="4595416"/>
+            <a:ext cx="5078730" cy="0"/>
+          </a:xfrm>
+          <a:prstGeom prst="line">
+            <a:avLst/>
+          </a:prstGeom>
+          <a:noFill/>
+          <a:ln w="12698">
+            <a:solidFill>
+              <a:srgbClr val="D6CCB8"/>
+            </a:solidFill>
+            <a:prstDash val="solid"/>
+          </a:ln>
+        </p:spPr>
+      </p:sp>
+      <p:sp>
+        <p:nvSpPr>
+          <p:cNvPr id="13" name="Text 11"/>
+          <p:cNvSpPr/>
+          <p:nvPr/>
+        </p:nvSpPr>
+        <p:spPr>
+          <a:xfrm>
+            <a:off x="947897" y="4143772"/>
+            <a:ext cx="5180305" cy="343694"/>
+          </a:xfrm>
+          <a:prstGeom prst="rect">
+            <a:avLst/>
+          </a:prstGeom>
+          <a:noFill/>
+          <a:ln/>
+        </p:spPr>
+        <p:txBody>
+          <a:bodyPr wrap="square" lIns="0" tIns="0" rIns="0" bIns="0" rtlCol="0" anchor="t"/>
+          <a:lstStyle/>
+          <a:p>
+            <a:pPr algn="l" indent="0" marL="0">
+              <a:lnSpc>
+                <a:spcPts val="2706"/>
+              </a:lnSpc>
+              <a:buNone/>
+            </a:pPr>
+            <a:r>
+              <a:rPr lang="en-US" sz="1866" dirty="0">
+                <a:solidFill>
+                  <a:srgbClr val="3D3528"/>
+                </a:solidFill>
+                <a:latin typeface="Work Sans" pitchFamily="34" charset="0"/>
+                <a:ea typeface="Work Sans" pitchFamily="34" charset="-122"/>
+                <a:cs typeface="Work Sans" pitchFamily="34" charset="-120"/>
+              </a:rPr>
+              <a:t>What is degraded but not yet paging</a:t>
+            </a:r>
+            <a:endParaRPr lang="en-US" sz="1866" dirty="0"/>
+          </a:p>
+        </p:txBody>
+      </p:sp>
+      <p:sp>
+        <p:nvSpPr>
+          <p:cNvPr id="14" name="Shape 12"/>
+          <p:cNvSpPr/>
+          <p:nvPr/>
+        </p:nvSpPr>
+        <p:spPr>
+          <a:xfrm>
+            <a:off x="947897" y="5155009"/>
+            <a:ext cx="5078730" cy="0"/>
+          </a:xfrm>
+          <a:prstGeom prst="line">
+            <a:avLst/>
+          </a:prstGeom>
+          <a:noFill/>
+          <a:ln w="12698">
+            <a:solidFill>
+              <a:srgbClr val="FFFFFF"/>
+            </a:solidFill>
+            <a:prstDash val="solid"/>
+          </a:ln>
+        </p:spPr>
+      </p:sp>
+      <p:sp>
+        <p:nvSpPr>
+          <p:cNvPr id="15" name="Text 13"/>
+          <p:cNvSpPr/>
+          <p:nvPr/>
+        </p:nvSpPr>
+        <p:spPr>
+          <a:xfrm>
+            <a:off x="947897" y="4703366"/>
+            <a:ext cx="5180305" cy="343694"/>
+          </a:xfrm>
+          <a:prstGeom prst="rect">
+            <a:avLst/>
+          </a:prstGeom>
+          <a:noFill/>
+          <a:ln/>
+        </p:spPr>
+        <p:txBody>
+          <a:bodyPr wrap="square" lIns="0" tIns="0" rIns="0" bIns="0" rtlCol="0" anchor="t"/>
+          <a:lstStyle/>
+          <a:p>
+            <a:pPr algn="l" indent="0" marL="0">
+              <a:lnSpc>
+                <a:spcPts val="2706"/>
+              </a:lnSpc>
+              <a:buNone/>
+            </a:pPr>
+            <a:r>
+              <a:rPr lang="en-US" sz="1866" dirty="0">
+                <a:solidFill>
+                  <a:srgbClr val="3D3528"/>
+                </a:solidFill>
+                <a:latin typeface="Work Sans" pitchFamily="34" charset="0"/>
+                <a:ea typeface="Work Sans" pitchFamily="34" charset="-122"/>
+                <a:cs typeface="Work Sans" pitchFamily="34" charset="-120"/>
+              </a:rPr>
+              <a:t>Who has been woken, and how often</a:t>
+            </a:r>
+            <a:endParaRPr lang="en-US" sz="1866" dirty="0"/>
+          </a:p>
+        </p:txBody>
+      </p:sp>
+      <p:sp>
+        <p:nvSpPr>
+          <p:cNvPr id="16" name="Text 14"/>
+          <p:cNvSpPr/>
+          <p:nvPr/>
+        </p:nvSpPr>
+        <p:spPr>
+          <a:xfrm>
+            <a:off x="6432926" y="2011363"/>
+            <a:ext cx="16863" cy="3536355"/>
+          </a:xfrm>
+          <a:prstGeom prst="rect">
+            <a:avLst/>
+          </a:prstGeom>
+          <a:solidFill>
+            <a:srgbClr val="D6CCB8"/>
+          </a:solidFill>
+          <a:ln/>
+        </p:spPr>
+        <p:txBody>
+          <a:bodyPr wrap="square" rtlCol="0" anchor="ctr"/>
+          <a:lstStyle/>
+          <a:p>
+            <a:pPr indent="0" marL="0">
+              <a:buNone/>
+            </a:pPr>
+            <a:endParaRPr lang="en-US" dirty="0"/>
+          </a:p>
+        </p:txBody>
+      </p:sp>
+      <p:sp>
+        <p:nvSpPr>
+          <p:cNvPr id="17" name="Text 15"/>
+          <p:cNvSpPr/>
+          <p:nvPr/>
+        </p:nvSpPr>
+        <p:spPr>
+          <a:xfrm>
+            <a:off x="6856087" y="2011363"/>
+            <a:ext cx="4472667" cy="284361"/>
+          </a:xfrm>
+          <a:prstGeom prst="rect">
+            <a:avLst/>
+          </a:prstGeom>
+          <a:noFill/>
+          <a:ln/>
+        </p:spPr>
+        <p:txBody>
+          <a:bodyPr wrap="square" lIns="0" tIns="0" rIns="0" bIns="0" rtlCol="0" anchor="t"/>
+          <a:lstStyle/>
+          <a:p>
+            <a:pPr algn="l" indent="0" marL="0">
+              <a:lnSpc>
+                <a:spcPts val="2240"/>
+              </a:lnSpc>
+              <a:spcAft>
+                <a:spcPts val="1333"/>
+              </a:spcAft>
+              <a:buNone/>
+            </a:pPr>
+            <a:r>
+              <a:rPr lang="en-US" sz="1600" b="1" dirty="0">
+                <a:solidFill>
+                  <a:srgbClr val="C2693F"/>
+                </a:solidFill>
+                <a:latin typeface="Work Sans" pitchFamily="34" charset="0"/>
+                <a:ea typeface="Work Sans" pitchFamily="34" charset="-122"/>
+                <a:cs typeface="Work Sans" pitchFamily="34" charset="-120"/>
+              </a:rPr>
+              <a:t>WHY IT CANNOT WAIT</a:t>
+            </a:r>
+            <a:endParaRPr lang="en-US" sz="1600" dirty="0"/>
+          </a:p>
+        </p:txBody>
+      </p:sp>
+      <p:sp>
+        <p:nvSpPr>
+          <p:cNvPr id="18" name="Text 16"/>
+          <p:cNvSpPr/>
+          <p:nvPr/>
+        </p:nvSpPr>
+        <p:spPr>
+          <a:xfrm>
+            <a:off x="6856087" y="2464991"/>
+            <a:ext cx="4472667" cy="792163"/>
+          </a:xfrm>
+          <a:prstGeom prst="rect">
+            <a:avLst/>
+          </a:prstGeom>
+          <a:noFill/>
+          <a:ln/>
+        </p:spPr>
+        <p:txBody>
+          <a:bodyPr wrap="square" lIns="0" tIns="0" rIns="0" bIns="0" rtlCol="0" anchor="t"/>
+          <a:lstStyle/>
+          <a:p>
+            <a:pPr algn="l" indent="0" marL="0">
+              <a:lnSpc>
+                <a:spcPts val="3120"/>
+              </a:lnSpc>
+              <a:spcAft>
+                <a:spcPts val="1600"/>
+              </a:spcAft>
+              <a:buNone/>
+            </a:pPr>
+            <a:r>
+              <a:rPr lang="en-US" sz="2400" dirty="0">
+                <a:solidFill>
+                  <a:srgbClr val="C2693F"/>
+                </a:solidFill>
+                <a:latin typeface="Work Sans" pitchFamily="34" charset="0"/>
+                <a:ea typeface="Work Sans" pitchFamily="34" charset="-122"/>
+                <a:cs typeface="Work Sans" pitchFamily="34" charset="-120"/>
+              </a:rPr>
+              <a:t>The person leaving the shift</a:t>
+            </a:r>
+            <a:endParaRPr lang="en-US" sz="2400" dirty="0"/>
+          </a:p>
+          <a:p>
+            <a:pPr algn="l" indent="0" marL="0">
+              <a:lnSpc>
+                <a:spcPts val="3120"/>
+              </a:lnSpc>
+              <a:spcAft>
+                <a:spcPts val="1600"/>
+              </a:spcAft>
+              <a:buNone/>
+            </a:pPr>
+            <a:r>
+              <a:rPr lang="en-US" sz="2400" dirty="0">
+                <a:solidFill>
+                  <a:srgbClr val="C2693F"/>
+                </a:solidFill>
+                <a:latin typeface="Work Sans" pitchFamily="34" charset="0"/>
+                <a:ea typeface="Work Sans" pitchFamily="34" charset="-122"/>
+                <a:cs typeface="Work Sans" pitchFamily="34" charset="-120"/>
+              </a:rPr>
+              <a:t>is the one who knows.</a:t>
+            </a:r>
+            <a:endParaRPr lang="en-US" sz="2400" dirty="0"/>
+          </a:p>
+        </p:txBody>
+      </p:sp>
+      <p:sp>
+        <p:nvSpPr>
+          <p:cNvPr id="19" name="Text 17"/>
+          <p:cNvSpPr/>
+          <p:nvPr/>
+        </p:nvSpPr>
+        <p:spPr>
+          <a:xfrm>
+            <a:off x="6856087" y="3460353"/>
+            <a:ext cx="4472667" cy="1031081"/>
+          </a:xfrm>
+          <a:prstGeom prst="rect">
+            <a:avLst/>
+          </a:prstGeom>
+          <a:noFill/>
+          <a:ln/>
+        </p:spPr>
+        <p:txBody>
+          <a:bodyPr wrap="square" lIns="0" tIns="0" rIns="0" bIns="0" rtlCol="0" anchor="t"/>
+          <a:lstStyle/>
+          <a:p>
+            <a:pPr algn="l" indent="0" marL="0">
+              <a:lnSpc>
+                <a:spcPts val="2706"/>
+              </a:lnSpc>
+              <a:buNone/>
+            </a:pPr>
+            <a:r>
+              <a:rPr lang="en-US" sz="1866" dirty="0">
+                <a:solidFill>
+                  <a:srgbClr val="3D3528"/>
+                </a:solidFill>
+                <a:latin typeface="Work Sans" pitchFamily="34" charset="0"/>
+                <a:ea typeface="Work Sans" pitchFamily="34" charset="-122"/>
+                <a:cs typeface="Work Sans" pitchFamily="34" charset="-120"/>
+              </a:rPr>
+              <a:t>The events are in the dashboard. The reasoning is in the head of the person going to bed.</a:t>
+            </a:r>
+            <a:endParaRPr lang="en-US" sz="1866" dirty="0"/>
+          </a:p>
+        </p:txBody>
+      </p:sp>
+      <p:sp>
+        <p:nvSpPr>
+          <p:cNvPr id="20" name="Text 18"/>
+          <p:cNvSpPr/>
+          <p:nvPr/>
+        </p:nvSpPr>
+        <p:spPr>
+          <a:xfrm>
+            <a:off x="6856087" y="4660702"/>
+            <a:ext cx="4472667" cy="687388"/>
+          </a:xfrm>
+          <a:prstGeom prst="rect">
+            <a:avLst/>
+          </a:prstGeom>
+          <a:noFill/>
+          <a:ln/>
+        </p:spPr>
+        <p:txBody>
+          <a:bodyPr wrap="square" lIns="0" tIns="0" rIns="0" bIns="0" rtlCol="0" anchor="t"/>
+          <a:lstStyle/>
+          <a:p>
+            <a:pPr algn="l" indent="0" marL="0">
+              <a:lnSpc>
+                <a:spcPts val="2706"/>
+              </a:lnSpc>
+              <a:spcBef>
+                <a:spcPts val="1333"/>
+              </a:spcBef>
+              <a:buNone/>
+            </a:pPr>
+            <a:r>
+              <a:rPr lang="en-US" sz="1866" dirty="0">
+                <a:solidFill>
+                  <a:srgbClr val="3D3528"/>
+                </a:solidFill>
+                <a:latin typeface="Work Sans" pitchFamily="34" charset="0"/>
+                <a:ea typeface="Work Sans" pitchFamily="34" charset="-122"/>
+                <a:cs typeface="Work Sans" pitchFamily="34" charset="-120"/>
+              </a:rPr>
+              <a:t>So the handover is work inside the shift, not a note sent after it.</a:t>
+            </a:r>
+            <a:endParaRPr lang="en-US" sz="1866" dirty="0"/>
+          </a:p>
+        </p:txBody>
+      </p:sp>
+      <p:sp>
+        <p:nvSpPr>
+          <p:cNvPr id="21" name="Text 19"/>
+          <p:cNvSpPr/>
+          <p:nvPr/>
+        </p:nvSpPr>
+        <p:spPr>
+          <a:xfrm>
+            <a:off x="947897" y="5784652"/>
+            <a:ext cx="10293157" cy="16867"/>
+          </a:xfrm>
+          <a:prstGeom prst="rect">
+            <a:avLst/>
+          </a:prstGeom>
+          <a:solidFill>
+            <a:srgbClr val="D6CCB8"/>
+          </a:solidFill>
+          <a:ln/>
+        </p:spPr>
+        <p:txBody>
+          <a:bodyPr wrap="square" rtlCol="0" anchor="ctr"/>
+          <a:lstStyle/>
+          <a:p>
+            <a:pPr indent="0" marL="0">
+              <a:buNone/>
+            </a:pPr>
+            <a:endParaRPr lang="en-US" dirty="0"/>
+          </a:p>
+        </p:txBody>
+      </p:sp>
+      <p:sp>
+        <p:nvSpPr>
+          <p:cNvPr id="22" name="Text 20"/>
+          <p:cNvSpPr/>
+          <p:nvPr/>
+        </p:nvSpPr>
+        <p:spPr>
+          <a:xfrm>
+            <a:off x="947897" y="5919986"/>
+            <a:ext cx="10499020" cy="260747"/>
+          </a:xfrm>
+          <a:prstGeom prst="rect">
+            <a:avLst/>
+          </a:prstGeom>
+          <a:noFill/>
+          <a:ln/>
+        </p:spPr>
+        <p:txBody>
+          <a:bodyPr wrap="square" lIns="0" tIns="0" rIns="0" bIns="0" rtlCol="0" anchor="t"/>
+          <a:lstStyle/>
+          <a:p>
+            <a:pPr algn="l" indent="0" marL="0">
+              <a:lnSpc>
+                <a:spcPts val="2053"/>
+              </a:lnSpc>
+              <a:spcBef>
+                <a:spcPts val="933"/>
+              </a:spcBef>
+              <a:buNone/>
+            </a:pPr>
+            <a:r>
+              <a:rPr lang="en-US" sz="1466" dirty="0">
+                <a:solidFill>
+                  <a:srgbClr val="3D3528"/>
+                </a:solidFill>
+                <a:latin typeface="Work Sans" pitchFamily="34" charset="0"/>
+                <a:ea typeface="Work Sans" pitchFamily="34" charset="-122"/>
+                <a:cs typeface="Work Sans" pitchFamily="34" charset="-120"/>
+              </a:rPr>
+              <a:t>No sourced figures: shift hours, page rates and roster sizes are unsourced.</a:t>
+            </a:r>
+            <a:endParaRPr lang="en-US" sz="1466" dirty="0"/>
+          </a:p>
+        </p:txBody>
+      </p:sp>
     </p:spTree>
   </p:cSld>
   <p:clrMapOvr>
@@ -1357,6 +3557,13 @@
 <file path=ppt/slides/slide4.xml><?xml version="1.0" encoding="utf-8"?>
 <p:sld xmlns:a="http://schemas.openxmlformats.org/drawingml/2006/main" xmlns:r="http://schemas.openxmlformats.org/officeDocument/2006/relationships" xmlns:p="http://schemas.openxmlformats.org/presentationml/2006/main">
   <p:cSld name="Slide 4">
+    <p:bg>
+      <p:bgPr>
+        <a:solidFill>
+          <a:srgbClr val="F2EBDF"/>
+        </a:solidFill>
+      </p:bgPr>
+    </p:bg>
     <p:spTree>
       <p:nvGrpSpPr>
         <p:cNvPr id="1" name=""/>
@@ -1371,30 +3578,960 @@
           <a:chExt cx="0" cy="0"/>
         </a:xfrm>
       </p:grpSpPr>
+      <p:sp>
+        <p:nvSpPr>
+          <p:cNvPr id="2" name="Text 0"/>
+          <p:cNvSpPr/>
+          <p:nvPr/>
+        </p:nvSpPr>
+        <p:spPr>
+          <a:xfrm>
+            <a:off x="947897" y="677267"/>
+            <a:ext cx="3045655" cy="284361"/>
+          </a:xfrm>
+          <a:prstGeom prst="rect">
+            <a:avLst/>
+          </a:prstGeom>
+          <a:noFill/>
+          <a:ln/>
+        </p:spPr>
+        <p:txBody>
+          <a:bodyPr wrap="square" lIns="0" tIns="0" rIns="0" bIns="0" rtlCol="0" anchor="t"/>
+          <a:lstStyle/>
+          <a:p>
+            <a:pPr algn="l" indent="0" marL="0">
+              <a:lnSpc>
+                <a:spcPts val="2240"/>
+              </a:lnSpc>
+              <a:buNone/>
+            </a:pPr>
+            <a:r>
+              <a:rPr lang="en-US" sz="1600" b="1" dirty="0">
+                <a:solidFill>
+                  <a:srgbClr val="C2693F"/>
+                </a:solidFill>
+                <a:latin typeface="Work Sans" pitchFamily="34" charset="0"/>
+                <a:ea typeface="Work Sans" pitchFamily="34" charset="-122"/>
+                <a:cs typeface="Work Sans" pitchFamily="34" charset="-120"/>
+              </a:rPr>
+              <a:t>THE NIGHT-PAGE CEILING</a:t>
+            </a:r>
+            <a:endParaRPr lang="en-US" sz="1600" dirty="0"/>
+          </a:p>
+        </p:txBody>
+      </p:sp>
+      <p:sp>
+        <p:nvSpPr>
+          <p:cNvPr id="3" name="Text 1"/>
+          <p:cNvSpPr/>
+          <p:nvPr/>
+        </p:nvSpPr>
+        <p:spPr>
+          <a:xfrm>
+            <a:off x="10416158" y="677267"/>
+            <a:ext cx="841395" cy="284361"/>
+          </a:xfrm>
+          <a:prstGeom prst="rect">
+            <a:avLst/>
+          </a:prstGeom>
+          <a:noFill/>
+          <a:ln/>
+        </p:spPr>
+        <p:txBody>
+          <a:bodyPr wrap="square" lIns="0" tIns="0" rIns="0" bIns="0" rtlCol="0" anchor="t"/>
+          <a:lstStyle/>
+          <a:p>
+            <a:pPr algn="l" indent="0" marL="0">
+              <a:lnSpc>
+                <a:spcPts val="2240"/>
+              </a:lnSpc>
+              <a:buNone/>
+            </a:pPr>
+            <a:r>
+              <a:rPr lang="en-US" sz="1600" b="1" dirty="0">
+                <a:solidFill>
+                  <a:srgbClr val="8A8170"/>
+                </a:solidFill>
+                <a:latin typeface="Work Sans" pitchFamily="34" charset="0"/>
+                <a:ea typeface="Work Sans" pitchFamily="34" charset="-122"/>
+                <a:cs typeface="Work Sans" pitchFamily="34" charset="-120"/>
+              </a:rPr>
+              <a:t>04 / 05</a:t>
+            </a:r>
+            <a:endParaRPr lang="en-US" sz="1600" dirty="0"/>
+          </a:p>
+        </p:txBody>
+      </p:sp>
+      <p:sp>
+        <p:nvSpPr>
+          <p:cNvPr id="4" name="Text 2"/>
+          <p:cNvSpPr/>
+          <p:nvPr/>
+        </p:nvSpPr>
+        <p:spPr>
+          <a:xfrm>
+            <a:off x="947897" y="1198563"/>
+            <a:ext cx="10499020" cy="609600"/>
+          </a:xfrm>
+          <a:prstGeom prst="rect">
+            <a:avLst/>
+          </a:prstGeom>
+          <a:noFill/>
+          <a:ln/>
+        </p:spPr>
+        <p:txBody>
+          <a:bodyPr wrap="square" lIns="0" tIns="0" rIns="0" bIns="0" rtlCol="0" anchor="t"/>
+          <a:lstStyle/>
+          <a:p>
+            <a:pPr algn="l" indent="0" marL="0">
+              <a:lnSpc>
+                <a:spcPts val="4799"/>
+              </a:lnSpc>
+              <a:spcAft>
+                <a:spcPts val="1333"/>
+              </a:spcAft>
+              <a:buNone/>
+            </a:pPr>
+            <a:r>
+              <a:rPr lang="en-US" sz="3999" dirty="0">
+                <a:solidFill>
+                  <a:srgbClr val="3D3528"/>
+                </a:solidFill>
+                <a:latin typeface="Work Sans" pitchFamily="34" charset="0"/>
+                <a:ea typeface="Work Sans" pitchFamily="34" charset="-122"/>
+                <a:cs typeface="Work Sans" pitchFamily="34" charset="-120"/>
+              </a:rPr>
+              <a:t>What a page ceiling forces upstream</a:t>
+            </a:r>
+            <a:endParaRPr lang="en-US" sz="3999" dirty="0"/>
+          </a:p>
+        </p:txBody>
+      </p:sp>
+      <p:sp>
+        <p:nvSpPr>
+          <p:cNvPr id="5" name="Text 3"/>
+          <p:cNvSpPr/>
+          <p:nvPr/>
+        </p:nvSpPr>
+        <p:spPr>
+          <a:xfrm>
+            <a:off x="947897" y="1977430"/>
+            <a:ext cx="10499020" cy="406202"/>
+          </a:xfrm>
+          <a:prstGeom prst="rect">
+            <a:avLst/>
+          </a:prstGeom>
+          <a:noFill/>
+          <a:ln/>
+        </p:spPr>
+        <p:txBody>
+          <a:bodyPr wrap="square" lIns="0" tIns="0" rIns="0" bIns="0" rtlCol="0" anchor="t"/>
+          <a:lstStyle/>
+          <a:p>
+            <a:pPr algn="l" indent="0" marL="0">
+              <a:lnSpc>
+                <a:spcPts val="3200"/>
+              </a:lnSpc>
+              <a:spcAft>
+                <a:spcPts val="1866"/>
+              </a:spcAft>
+              <a:buNone/>
+            </a:pPr>
+            <a:r>
+              <a:rPr lang="en-US" sz="2133" dirty="0">
+                <a:solidFill>
+                  <a:srgbClr val="3D3528"/>
+                </a:solidFill>
+                <a:latin typeface="Work Sans" pitchFamily="34" charset="0"/>
+                <a:ea typeface="Work Sans" pitchFamily="34" charset="-122"/>
+                <a:cs typeface="Work Sans" pitchFamily="34" charset="-120"/>
+              </a:rPr>
+              <a:t>A ceiling does not reduce pages. It converts them into scheduled work.</a:t>
+            </a:r>
+            <a:endParaRPr lang="en-US" sz="2133" dirty="0"/>
+          </a:p>
+        </p:txBody>
+      </p:sp>
+      <p:sp>
+        <p:nvSpPr>
+          <p:cNvPr id="6" name="Text 4"/>
+          <p:cNvSpPr/>
+          <p:nvPr/>
+        </p:nvSpPr>
+        <p:spPr>
+          <a:xfrm>
+            <a:off x="947897" y="2620566"/>
+            <a:ext cx="3160121" cy="1142603"/>
+          </a:xfrm>
+          <a:prstGeom prst="roundRect">
+            <a:avLst>
+              <a:gd name="adj" fmla="val 13336"/>
+            </a:avLst>
+          </a:prstGeom>
+          <a:noFill/>
+          <a:ln w="12698">
+            <a:solidFill>
+              <a:srgbClr val="3D3528"/>
+            </a:solidFill>
+          </a:ln>
+        </p:spPr>
+        <p:txBody>
+          <a:bodyPr wrap="square" rtlCol="0" anchor="ctr"/>
+          <a:lstStyle/>
+          <a:p>
+            <a:pPr indent="0" marL="0">
+              <a:buNone/>
+            </a:pPr>
+            <a:endParaRPr lang="en-US" dirty="0"/>
+          </a:p>
+        </p:txBody>
+      </p:sp>
+      <p:sp>
+        <p:nvSpPr>
+          <p:cNvPr id="7" name="Text 5"/>
+          <p:cNvSpPr/>
+          <p:nvPr/>
+        </p:nvSpPr>
+        <p:spPr>
+          <a:xfrm>
+            <a:off x="1129819" y="2802533"/>
+            <a:ext cx="338450" cy="338534"/>
+          </a:xfrm>
+          <a:prstGeom prst="roundRect">
+            <a:avLst>
+              <a:gd name="adj" fmla="val 360185"/>
+            </a:avLst>
+          </a:prstGeom>
+          <a:solidFill>
+            <a:srgbClr val="C2693F"/>
+          </a:solidFill>
+          <a:ln/>
+        </p:spPr>
+        <p:txBody>
+          <a:bodyPr wrap="square" rtlCol="0" anchor="ctr"/>
+          <a:lstStyle/>
+          <a:p>
+            <a:pPr indent="0" marL="0">
+              <a:buNone/>
+            </a:pPr>
+            <a:endParaRPr lang="en-US" dirty="0"/>
+          </a:p>
+        </p:txBody>
+      </p:sp>
+      <p:sp>
+        <p:nvSpPr>
+          <p:cNvPr id="8" name="Text 6"/>
+          <p:cNvSpPr/>
+          <p:nvPr/>
+        </p:nvSpPr>
+        <p:spPr>
+          <a:xfrm>
+            <a:off x="1260953" y="2841427"/>
+            <a:ext cx="77705" cy="260747"/>
+          </a:xfrm>
+          <a:prstGeom prst="rect">
+            <a:avLst/>
+          </a:prstGeom>
+          <a:noFill/>
+          <a:ln/>
+        </p:spPr>
+        <p:txBody>
+          <a:bodyPr wrap="square" lIns="0" tIns="0" rIns="0" bIns="0" rtlCol="0" anchor="t"/>
+          <a:lstStyle/>
+          <a:p>
+            <a:pPr algn="l" indent="0" marL="0">
+              <a:lnSpc>
+                <a:spcPts val="2053"/>
+              </a:lnSpc>
+              <a:buNone/>
+            </a:pPr>
+            <a:r>
+              <a:rPr lang="en-US" sz="1466" b="1" dirty="0">
+                <a:solidFill>
+                  <a:srgbClr val="FBF7EF"/>
+                </a:solidFill>
+                <a:latin typeface="Work Sans" pitchFamily="34" charset="0"/>
+                <a:ea typeface="Work Sans" pitchFamily="34" charset="-122"/>
+                <a:cs typeface="Work Sans" pitchFamily="34" charset="-120"/>
+              </a:rPr>
+              <a:t>1</a:t>
+            </a:r>
+            <a:endParaRPr lang="en-US" sz="1466" dirty="0"/>
+          </a:p>
+        </p:txBody>
+      </p:sp>
+      <p:sp>
+        <p:nvSpPr>
+          <p:cNvPr id="9" name="Text 7"/>
+          <p:cNvSpPr/>
+          <p:nvPr/>
+        </p:nvSpPr>
+        <p:spPr>
+          <a:xfrm>
+            <a:off x="1129819" y="3225602"/>
+            <a:ext cx="2227531" cy="355600"/>
+          </a:xfrm>
+          <a:prstGeom prst="rect">
+            <a:avLst/>
+          </a:prstGeom>
+          <a:noFill/>
+          <a:ln/>
+        </p:spPr>
+        <p:txBody>
+          <a:bodyPr wrap="square" lIns="0" tIns="0" rIns="0" bIns="0" rtlCol="0" anchor="t"/>
+          <a:lstStyle/>
+          <a:p>
+            <a:pPr algn="l" indent="0" marL="0">
+              <a:lnSpc>
+                <a:spcPts val="2800"/>
+              </a:lnSpc>
+              <a:buNone/>
+            </a:pPr>
+            <a:r>
+              <a:rPr lang="en-US" sz="2000" dirty="0">
+                <a:solidFill>
+                  <a:srgbClr val="3D3528"/>
+                </a:solidFill>
+                <a:latin typeface="Work Sans" pitchFamily="34" charset="0"/>
+                <a:ea typeface="Work Sans" pitchFamily="34" charset="-122"/>
+                <a:cs typeface="Work Sans" pitchFamily="34" charset="-120"/>
+              </a:rPr>
+              <a:t>A night page fires</a:t>
+            </a:r>
+            <a:endParaRPr lang="en-US" sz="2000" dirty="0"/>
+          </a:p>
+        </p:txBody>
+      </p:sp>
       <p:pic>
         <p:nvPicPr>
-          <p:cNvPr id="2" name="Image 0" descr="/tmp/slide-1787840551335-6a3upfir2k9.png">    </p:cNvPr>
+          <p:cNvPr id="10" name="Image 0" descr="preencoded.png">    </p:cNvPr>
           <p:cNvPicPr>
             <a:picLocks noChangeAspect="1"/>
           </p:cNvPicPr>
           <p:nvPr/>
         </p:nvPicPr>
         <p:blipFill>
-          <a:blip r:embed="rId1"/>
+          <a:blip r:embed="rId1">
+            <a:extLst>
+              <a:ext uri="{96DAC541-7B7A-43D3-8B79-37D633B846F1}">
+                <asvg:svgBlip xmlns:asvg="http://schemas.microsoft.com/office/drawing/2016/SVG/main" r:embed="rId2"/>
+              </a:ext>
+            </a:extLst>
+          </a:blip>
           <a:stretch>
             <a:fillRect/>
           </a:stretch>
         </p:blipFill>
         <p:spPr>
           <a:xfrm>
-            <a:off x="0" y="0"/>
-            <a:ext cx="12188952" cy="6858000"/>
+            <a:off x="4108018" y="3306167"/>
+            <a:ext cx="406298" cy="270867"/>
           </a:xfrm>
           <a:prstGeom prst="rect">
             <a:avLst/>
           </a:prstGeom>
         </p:spPr>
       </p:pic>
+      <p:sp>
+        <p:nvSpPr>
+          <p:cNvPr id="11" name="Text 8"/>
+          <p:cNvSpPr/>
+          <p:nvPr/>
+        </p:nvSpPr>
+        <p:spPr>
+          <a:xfrm>
+            <a:off x="4514316" y="2620566"/>
+            <a:ext cx="3160121" cy="1142603"/>
+          </a:xfrm>
+          <a:prstGeom prst="roundRect">
+            <a:avLst>
+              <a:gd name="adj" fmla="val 13336"/>
+            </a:avLst>
+          </a:prstGeom>
+          <a:noFill/>
+          <a:ln w="12698">
+            <a:solidFill>
+              <a:srgbClr val="3D3528"/>
+            </a:solidFill>
+          </a:ln>
+        </p:spPr>
+        <p:txBody>
+          <a:bodyPr wrap="square" rtlCol="0" anchor="ctr"/>
+          <a:lstStyle/>
+          <a:p>
+            <a:pPr indent="0" marL="0">
+              <a:buNone/>
+            </a:pPr>
+            <a:endParaRPr lang="en-US" dirty="0"/>
+          </a:p>
+        </p:txBody>
+      </p:sp>
+      <p:sp>
+        <p:nvSpPr>
+          <p:cNvPr id="12" name="Text 9"/>
+          <p:cNvSpPr/>
+          <p:nvPr/>
+        </p:nvSpPr>
+        <p:spPr>
+          <a:xfrm>
+            <a:off x="4696238" y="2802533"/>
+            <a:ext cx="338450" cy="338534"/>
+          </a:xfrm>
+          <a:prstGeom prst="roundRect">
+            <a:avLst>
+              <a:gd name="adj" fmla="val 360185"/>
+            </a:avLst>
+          </a:prstGeom>
+          <a:solidFill>
+            <a:srgbClr val="C2693F"/>
+          </a:solidFill>
+          <a:ln/>
+        </p:spPr>
+        <p:txBody>
+          <a:bodyPr wrap="square" rtlCol="0" anchor="ctr"/>
+          <a:lstStyle/>
+          <a:p>
+            <a:pPr indent="0" marL="0">
+              <a:buNone/>
+            </a:pPr>
+            <a:endParaRPr lang="en-US" dirty="0"/>
+          </a:p>
+        </p:txBody>
+      </p:sp>
+      <p:sp>
+        <p:nvSpPr>
+          <p:cNvPr id="13" name="Text 10"/>
+          <p:cNvSpPr/>
+          <p:nvPr/>
+        </p:nvSpPr>
+        <p:spPr>
+          <a:xfrm>
+            <a:off x="4808327" y="2841427"/>
+            <a:ext cx="116557" cy="260747"/>
+          </a:xfrm>
+          <a:prstGeom prst="rect">
+            <a:avLst/>
+          </a:prstGeom>
+          <a:noFill/>
+          <a:ln/>
+        </p:spPr>
+        <p:txBody>
+          <a:bodyPr wrap="square" lIns="0" tIns="0" rIns="0" bIns="0" rtlCol="0" anchor="t"/>
+          <a:lstStyle/>
+          <a:p>
+            <a:pPr algn="l" indent="0" marL="0">
+              <a:lnSpc>
+                <a:spcPts val="2053"/>
+              </a:lnSpc>
+              <a:buNone/>
+            </a:pPr>
+            <a:r>
+              <a:rPr lang="en-US" sz="1466" b="1" dirty="0">
+                <a:solidFill>
+                  <a:srgbClr val="FBF7EF"/>
+                </a:solidFill>
+                <a:latin typeface="Work Sans" pitchFamily="34" charset="0"/>
+                <a:ea typeface="Work Sans" pitchFamily="34" charset="-122"/>
+                <a:cs typeface="Work Sans" pitchFamily="34" charset="-120"/>
+              </a:rPr>
+              <a:t>2</a:t>
+            </a:r>
+            <a:endParaRPr lang="en-US" sz="1466" dirty="0"/>
+          </a:p>
+        </p:txBody>
+      </p:sp>
+      <p:sp>
+        <p:nvSpPr>
+          <p:cNvPr id="14" name="Text 11"/>
+          <p:cNvSpPr/>
+          <p:nvPr/>
+        </p:nvSpPr>
+        <p:spPr>
+          <a:xfrm>
+            <a:off x="4696238" y="3225602"/>
+            <a:ext cx="2072122" cy="355600"/>
+          </a:xfrm>
+          <a:prstGeom prst="rect">
+            <a:avLst/>
+          </a:prstGeom>
+          <a:noFill/>
+          <a:ln/>
+        </p:spPr>
+        <p:txBody>
+          <a:bodyPr wrap="square" lIns="0" tIns="0" rIns="0" bIns="0" rtlCol="0" anchor="t"/>
+          <a:lstStyle/>
+          <a:p>
+            <a:pPr algn="l" indent="0" marL="0">
+              <a:lnSpc>
+                <a:spcPts val="2800"/>
+              </a:lnSpc>
+              <a:buNone/>
+            </a:pPr>
+            <a:r>
+              <a:rPr lang="en-US" sz="2000" dirty="0">
+                <a:solidFill>
+                  <a:srgbClr val="3D3528"/>
+                </a:solidFill>
+                <a:latin typeface="Work Sans" pitchFamily="34" charset="0"/>
+                <a:ea typeface="Work Sans" pitchFamily="34" charset="-122"/>
+                <a:cs typeface="Work Sans" pitchFamily="34" charset="-120"/>
+              </a:rPr>
+              <a:t>The ceiling is hit</a:t>
+            </a:r>
+            <a:endParaRPr lang="en-US" sz="2000" dirty="0"/>
+          </a:p>
+        </p:txBody>
+      </p:sp>
+      <p:pic>
+        <p:nvPicPr>
+          <p:cNvPr id="15" name="Image 1" descr="preencoded.png">    </p:cNvPr>
+          <p:cNvPicPr>
+            <a:picLocks noChangeAspect="1"/>
+          </p:cNvPicPr>
+          <p:nvPr/>
+        </p:nvPicPr>
+        <p:blipFill>
+          <a:blip r:embed="rId3">
+            <a:extLst>
+              <a:ext uri="{96DAC541-7B7A-43D3-8B79-37D633B846F1}">
+                <asvg:svgBlip xmlns:asvg="http://schemas.microsoft.com/office/drawing/2016/SVG/main" r:embed="rId4"/>
+              </a:ext>
+            </a:extLst>
+          </a:blip>
+          <a:stretch>
+            <a:fillRect/>
+          </a:stretch>
+        </p:blipFill>
+        <p:spPr>
+          <a:xfrm>
+            <a:off x="7674437" y="3306167"/>
+            <a:ext cx="406298" cy="270867"/>
+          </a:xfrm>
+          <a:prstGeom prst="rect">
+            <a:avLst/>
+          </a:prstGeom>
+        </p:spPr>
+      </p:pic>
+      <p:sp>
+        <p:nvSpPr>
+          <p:cNvPr id="16" name="Text 12"/>
+          <p:cNvSpPr/>
+          <p:nvPr/>
+        </p:nvSpPr>
+        <p:spPr>
+          <a:xfrm>
+            <a:off x="8080736" y="2620566"/>
+            <a:ext cx="3160121" cy="1142603"/>
+          </a:xfrm>
+          <a:prstGeom prst="roundRect">
+            <a:avLst>
+              <a:gd name="adj" fmla="val 13336"/>
+            </a:avLst>
+          </a:prstGeom>
+          <a:noFill/>
+          <a:ln w="12698">
+            <a:solidFill>
+              <a:srgbClr val="3D3528"/>
+            </a:solidFill>
+          </a:ln>
+        </p:spPr>
+        <p:txBody>
+          <a:bodyPr wrap="square" rtlCol="0" anchor="ctr"/>
+          <a:lstStyle/>
+          <a:p>
+            <a:pPr indent="0" marL="0">
+              <a:buNone/>
+            </a:pPr>
+            <a:endParaRPr lang="en-US" dirty="0"/>
+          </a:p>
+        </p:txBody>
+      </p:sp>
+      <p:sp>
+        <p:nvSpPr>
+          <p:cNvPr id="17" name="Text 13"/>
+          <p:cNvSpPr/>
+          <p:nvPr/>
+        </p:nvSpPr>
+        <p:spPr>
+          <a:xfrm>
+            <a:off x="8262657" y="2802533"/>
+            <a:ext cx="338450" cy="338534"/>
+          </a:xfrm>
+          <a:prstGeom prst="roundRect">
+            <a:avLst>
+              <a:gd name="adj" fmla="val 360185"/>
+            </a:avLst>
+          </a:prstGeom>
+          <a:solidFill>
+            <a:srgbClr val="C2693F"/>
+          </a:solidFill>
+          <a:ln/>
+        </p:spPr>
+        <p:txBody>
+          <a:bodyPr wrap="square" rtlCol="0" anchor="ctr"/>
+          <a:lstStyle/>
+          <a:p>
+            <a:pPr indent="0" marL="0">
+              <a:buNone/>
+            </a:pPr>
+            <a:endParaRPr lang="en-US" dirty="0"/>
+          </a:p>
+        </p:txBody>
+      </p:sp>
+      <p:sp>
+        <p:nvSpPr>
+          <p:cNvPr id="18" name="Text 14"/>
+          <p:cNvSpPr/>
+          <p:nvPr/>
+        </p:nvSpPr>
+        <p:spPr>
+          <a:xfrm>
+            <a:off x="8374746" y="2841427"/>
+            <a:ext cx="116557" cy="260747"/>
+          </a:xfrm>
+          <a:prstGeom prst="rect">
+            <a:avLst/>
+          </a:prstGeom>
+          <a:noFill/>
+          <a:ln/>
+        </p:spPr>
+        <p:txBody>
+          <a:bodyPr wrap="square" lIns="0" tIns="0" rIns="0" bIns="0" rtlCol="0" anchor="t"/>
+          <a:lstStyle/>
+          <a:p>
+            <a:pPr algn="l" indent="0" marL="0">
+              <a:lnSpc>
+                <a:spcPts val="2053"/>
+              </a:lnSpc>
+              <a:buNone/>
+            </a:pPr>
+            <a:r>
+              <a:rPr lang="en-US" sz="1466" b="1" dirty="0">
+                <a:solidFill>
+                  <a:srgbClr val="FBF7EF"/>
+                </a:solidFill>
+                <a:latin typeface="Work Sans" pitchFamily="34" charset="0"/>
+                <a:ea typeface="Work Sans" pitchFamily="34" charset="-122"/>
+                <a:cs typeface="Work Sans" pitchFamily="34" charset="-120"/>
+              </a:rPr>
+              <a:t>3</a:t>
+            </a:r>
+            <a:endParaRPr lang="en-US" sz="1466" dirty="0"/>
+          </a:p>
+        </p:txBody>
+      </p:sp>
+      <p:sp>
+        <p:nvSpPr>
+          <p:cNvPr id="19" name="Text 15"/>
+          <p:cNvSpPr/>
+          <p:nvPr/>
+        </p:nvSpPr>
+        <p:spPr>
+          <a:xfrm>
+            <a:off x="8262657" y="3225602"/>
+            <a:ext cx="2693758" cy="355600"/>
+          </a:xfrm>
+          <a:prstGeom prst="rect">
+            <a:avLst/>
+          </a:prstGeom>
+          <a:noFill/>
+          <a:ln/>
+        </p:spPr>
+        <p:txBody>
+          <a:bodyPr wrap="square" lIns="0" tIns="0" rIns="0" bIns="0" rtlCol="0" anchor="t"/>
+          <a:lstStyle/>
+          <a:p>
+            <a:pPr algn="l" indent="0" marL="0">
+              <a:lnSpc>
+                <a:spcPts val="2800"/>
+              </a:lnSpc>
+              <a:buNone/>
+            </a:pPr>
+            <a:r>
+              <a:rPr lang="en-US" sz="2000" dirty="0">
+                <a:solidFill>
+                  <a:srgbClr val="3D3528"/>
+                </a:solidFill>
+                <a:latin typeface="Work Sans" pitchFamily="34" charset="0"/>
+                <a:ea typeface="Work Sans" pitchFamily="34" charset="-122"/>
+                <a:cs typeface="Work Sans" pitchFamily="34" charset="-120"/>
+              </a:rPr>
+              <a:t>An owner, and a date</a:t>
+            </a:r>
+            <a:endParaRPr lang="en-US" sz="2000" dirty="0"/>
+          </a:p>
+        </p:txBody>
+      </p:sp>
+      <p:sp>
+        <p:nvSpPr>
+          <p:cNvPr id="20" name="Shape 16"/>
+          <p:cNvSpPr/>
+          <p:nvPr/>
+        </p:nvSpPr>
+        <p:spPr>
+          <a:xfrm>
+            <a:off x="947897" y="4519414"/>
+            <a:ext cx="10293157" cy="0"/>
+          </a:xfrm>
+          <a:prstGeom prst="line">
+            <a:avLst/>
+          </a:prstGeom>
+          <a:noFill/>
+          <a:ln w="12698">
+            <a:solidFill>
+              <a:srgbClr val="D6CCB8"/>
+            </a:solidFill>
+            <a:prstDash val="solid"/>
+          </a:ln>
+        </p:spPr>
+      </p:sp>
+      <p:sp>
+        <p:nvSpPr>
+          <p:cNvPr id="21" name="Text 17"/>
+          <p:cNvSpPr/>
+          <p:nvPr/>
+        </p:nvSpPr>
+        <p:spPr>
+          <a:xfrm>
+            <a:off x="947897" y="4034036"/>
+            <a:ext cx="10499020" cy="343694"/>
+          </a:xfrm>
+          <a:prstGeom prst="rect">
+            <a:avLst/>
+          </a:prstGeom>
+          <a:noFill/>
+          <a:ln/>
+        </p:spPr>
+        <p:txBody>
+          <a:bodyPr wrap="square" lIns="0" tIns="0" rIns="0" bIns="0" rtlCol="0" anchor="t"/>
+          <a:lstStyle/>
+          <a:p>
+            <a:pPr algn="l" indent="0" marL="0">
+              <a:lnSpc>
+                <a:spcPts val="2706"/>
+              </a:lnSpc>
+              <a:buNone/>
+            </a:pPr>
+            <a:r>
+              <a:rPr lang="en-US" sz="1866" dirty="0">
+                <a:solidFill>
+                  <a:srgbClr val="3D3528"/>
+                </a:solidFill>
+                <a:latin typeface="Work Sans" pitchFamily="34" charset="0"/>
+                <a:ea typeface="Work Sans" pitchFamily="34" charset="-122"/>
+                <a:cs typeface="Work Sans" pitchFamily="34" charset="-120"/>
+              </a:rPr>
+              <a:t>A breach becomes an engineering ticket, not a personal apology.</a:t>
+            </a:r>
+            <a:endParaRPr lang="en-US" sz="1866" dirty="0"/>
+          </a:p>
+        </p:txBody>
+      </p:sp>
+      <p:sp>
+        <p:nvSpPr>
+          <p:cNvPr id="22" name="Shape 18"/>
+          <p:cNvSpPr/>
+          <p:nvPr/>
+        </p:nvSpPr>
+        <p:spPr>
+          <a:xfrm>
+            <a:off x="947897" y="5146477"/>
+            <a:ext cx="10293157" cy="0"/>
+          </a:xfrm>
+          <a:prstGeom prst="line">
+            <a:avLst/>
+          </a:prstGeom>
+          <a:noFill/>
+          <a:ln w="12698">
+            <a:solidFill>
+              <a:srgbClr val="D6CCB8"/>
+            </a:solidFill>
+            <a:prstDash val="solid"/>
+          </a:ln>
+        </p:spPr>
+      </p:sp>
+      <p:sp>
+        <p:nvSpPr>
+          <p:cNvPr id="23" name="Text 19"/>
+          <p:cNvSpPr/>
+          <p:nvPr/>
+        </p:nvSpPr>
+        <p:spPr>
+          <a:xfrm>
+            <a:off x="947897" y="4661098"/>
+            <a:ext cx="10499020" cy="343694"/>
+          </a:xfrm>
+          <a:prstGeom prst="rect">
+            <a:avLst/>
+          </a:prstGeom>
+          <a:noFill/>
+          <a:ln/>
+        </p:spPr>
+        <p:txBody>
+          <a:bodyPr wrap="square" lIns="0" tIns="0" rIns="0" bIns="0" rtlCol="0" anchor="t"/>
+          <a:lstStyle/>
+          <a:p>
+            <a:pPr algn="l" indent="0" marL="0">
+              <a:lnSpc>
+                <a:spcPts val="2706"/>
+              </a:lnSpc>
+              <a:buNone/>
+            </a:pPr>
+            <a:r>
+              <a:rPr lang="en-US" sz="1866" dirty="0">
+                <a:solidFill>
+                  <a:srgbClr val="3D3528"/>
+                </a:solidFill>
+                <a:latin typeface="Work Sans" pitchFamily="34" charset="0"/>
+                <a:ea typeface="Work Sans" pitchFamily="34" charset="-122"/>
+                <a:cs typeface="Work Sans" pitchFamily="34" charset="-120"/>
+              </a:rPr>
+              <a:t>An alert that cannot live under the ceiling is deleted or moved to daytime.</a:t>
+            </a:r>
+            <a:endParaRPr lang="en-US" sz="1866" dirty="0"/>
+          </a:p>
+        </p:txBody>
+      </p:sp>
+      <p:sp>
+        <p:nvSpPr>
+          <p:cNvPr id="24" name="Shape 20"/>
+          <p:cNvSpPr/>
+          <p:nvPr/>
+        </p:nvSpPr>
+        <p:spPr>
+          <a:xfrm>
+            <a:off x="947897" y="5773539"/>
+            <a:ext cx="10293157" cy="0"/>
+          </a:xfrm>
+          <a:prstGeom prst="line">
+            <a:avLst/>
+          </a:prstGeom>
+          <a:noFill/>
+          <a:ln w="12698">
+            <a:solidFill>
+              <a:srgbClr val="FFFFFF"/>
+            </a:solidFill>
+            <a:prstDash val="solid"/>
+          </a:ln>
+        </p:spPr>
+      </p:sp>
+      <p:sp>
+        <p:nvSpPr>
+          <p:cNvPr id="25" name="Text 21"/>
+          <p:cNvSpPr/>
+          <p:nvPr/>
+        </p:nvSpPr>
+        <p:spPr>
+          <a:xfrm>
+            <a:off x="947897" y="5288161"/>
+            <a:ext cx="10499020" cy="343694"/>
+          </a:xfrm>
+          <a:prstGeom prst="rect">
+            <a:avLst/>
+          </a:prstGeom>
+          <a:noFill/>
+          <a:ln/>
+        </p:spPr>
+        <p:txBody>
+          <a:bodyPr wrap="square" lIns="0" tIns="0" rIns="0" bIns="0" rtlCol="0" anchor="t"/>
+          <a:lstStyle/>
+          <a:p>
+            <a:pPr algn="l" indent="0" marL="0">
+              <a:lnSpc>
+                <a:spcPts val="2706"/>
+              </a:lnSpc>
+              <a:buNone/>
+            </a:pPr>
+            <a:r>
+              <a:rPr lang="en-US" sz="1866" dirty="0">
+                <a:solidFill>
+                  <a:srgbClr val="3D3528"/>
+                </a:solidFill>
+                <a:latin typeface="Work Sans" pitchFamily="34" charset="0"/>
+                <a:ea typeface="Work Sans" pitchFamily="34" charset="-122"/>
+                <a:cs typeface="Work Sans" pitchFamily="34" charset="-120"/>
+              </a:rPr>
+              <a:t>A system that only survives because someone is awake finally gets its fix.</a:t>
+            </a:r>
+            <a:endParaRPr lang="en-US" sz="1866" dirty="0"/>
+          </a:p>
+        </p:txBody>
+      </p:sp>
+      <p:sp>
+        <p:nvSpPr>
+          <p:cNvPr id="26" name="Text 22"/>
+          <p:cNvSpPr/>
+          <p:nvPr/>
+        </p:nvSpPr>
+        <p:spPr>
+          <a:xfrm>
+            <a:off x="947897" y="5784652"/>
+            <a:ext cx="10293157" cy="16867"/>
+          </a:xfrm>
+          <a:prstGeom prst="rect">
+            <a:avLst/>
+          </a:prstGeom>
+          <a:solidFill>
+            <a:srgbClr val="D6CCB8"/>
+          </a:solidFill>
+          <a:ln/>
+        </p:spPr>
+        <p:txBody>
+          <a:bodyPr wrap="square" rtlCol="0" anchor="ctr"/>
+          <a:lstStyle/>
+          <a:p>
+            <a:pPr indent="0" marL="0">
+              <a:buNone/>
+            </a:pPr>
+            <a:endParaRPr lang="en-US" dirty="0"/>
+          </a:p>
+        </p:txBody>
+      </p:sp>
+      <p:sp>
+        <p:nvSpPr>
+          <p:cNvPr id="27" name="Text 23"/>
+          <p:cNvSpPr/>
+          <p:nvPr/>
+        </p:nvSpPr>
+        <p:spPr>
+          <a:xfrm>
+            <a:off x="947897" y="5919986"/>
+            <a:ext cx="10499020" cy="260747"/>
+          </a:xfrm>
+          <a:prstGeom prst="rect">
+            <a:avLst/>
+          </a:prstGeom>
+          <a:noFill/>
+          <a:ln/>
+        </p:spPr>
+        <p:txBody>
+          <a:bodyPr wrap="square" lIns="0" tIns="0" rIns="0" bIns="0" rtlCol="0" anchor="t"/>
+          <a:lstStyle/>
+          <a:p>
+            <a:pPr algn="l" indent="0" marL="0">
+              <a:lnSpc>
+                <a:spcPts val="2053"/>
+              </a:lnSpc>
+              <a:spcBef>
+                <a:spcPts val="933"/>
+              </a:spcBef>
+              <a:buNone/>
+            </a:pPr>
+            <a:r>
+              <a:rPr lang="en-US" sz="1466" dirty="0">
+                <a:solidFill>
+                  <a:srgbClr val="3D3528"/>
+                </a:solidFill>
+                <a:latin typeface="Work Sans" pitchFamily="34" charset="0"/>
+                <a:ea typeface="Work Sans" pitchFamily="34" charset="-122"/>
+                <a:cs typeface="Work Sans" pitchFamily="34" charset="-120"/>
+              </a:rPr>
+              <a:t>No sourced figures: shift hours, page rates and roster sizes are unsourced.</a:t>
+            </a:r>
+            <a:endParaRPr lang="en-US" sz="1466" dirty="0"/>
+          </a:p>
+        </p:txBody>
+      </p:sp>
     </p:spTree>
   </p:cSld>
   <p:clrMapOvr>
@@ -1406,6 +4543,13 @@
 <file path=ppt/slides/slide5.xml><?xml version="1.0" encoding="utf-8"?>
 <p:sld xmlns:a="http://schemas.openxmlformats.org/drawingml/2006/main" xmlns:r="http://schemas.openxmlformats.org/officeDocument/2006/relationships" xmlns:p="http://schemas.openxmlformats.org/presentationml/2006/main">
   <p:cSld name="Slide 5">
+    <p:bg>
+      <p:bgPr>
+        <a:solidFill>
+          <a:srgbClr val="F2EBDF"/>
+        </a:solidFill>
+      </p:bgPr>
+    </p:bg>
     <p:spTree>
       <p:nvGrpSpPr>
         <p:cNvPr id="1" name=""/>
@@ -1420,30 +4564,617 @@
           <a:chExt cx="0" cy="0"/>
         </a:xfrm>
       </p:grpSpPr>
-      <p:pic>
-        <p:nvPicPr>
-          <p:cNvPr id="2" name="Image 0" descr="/tmp/slide-1787840551606-t9kxs0207ck.png">    </p:cNvPr>
-          <p:cNvPicPr>
-            <a:picLocks noChangeAspect="1"/>
-          </p:cNvPicPr>
-          <p:nvPr/>
-        </p:nvPicPr>
-        <p:blipFill>
-          <a:blip r:embed="rId1"/>
-          <a:stretch>
-            <a:fillRect/>
-          </a:stretch>
-        </p:blipFill>
-        <p:spPr>
-          <a:xfrm>
-            <a:off x="0" y="0"/>
-            <a:ext cx="12188952" cy="6858000"/>
-          </a:xfrm>
-          <a:prstGeom prst="rect">
-            <a:avLst/>
-          </a:prstGeom>
-        </p:spPr>
-      </p:pic>
+      <p:sp>
+        <p:nvSpPr>
+          <p:cNvPr id="2" name="Text 0"/>
+          <p:cNvSpPr/>
+          <p:nvPr/>
+        </p:nvSpPr>
+        <p:spPr>
+          <a:xfrm>
+            <a:off x="947897" y="677267"/>
+            <a:ext cx="1276055" cy="284361"/>
+          </a:xfrm>
+          <a:prstGeom prst="rect">
+            <a:avLst/>
+          </a:prstGeom>
+          <a:noFill/>
+          <a:ln/>
+        </p:spPr>
+        <p:txBody>
+          <a:bodyPr wrap="square" lIns="0" tIns="0" rIns="0" bIns="0" rtlCol="0" anchor="t"/>
+          <a:lstStyle/>
+          <a:p>
+            <a:pPr algn="l" indent="0" marL="0">
+              <a:lnSpc>
+                <a:spcPts val="2240"/>
+              </a:lnSpc>
+              <a:buNone/>
+            </a:pPr>
+            <a:r>
+              <a:rPr lang="en-US" sz="1600" b="1" dirty="0">
+                <a:solidFill>
+                  <a:srgbClr val="C2693F"/>
+                </a:solidFill>
+                <a:latin typeface="Work Sans" pitchFamily="34" charset="0"/>
+                <a:ea typeface="Work Sans" pitchFamily="34" charset="-122"/>
+                <a:cs typeface="Work Sans" pitchFamily="34" charset="-120"/>
+              </a:rPr>
+              <a:t>DECISIONS</a:t>
+            </a:r>
+            <a:endParaRPr lang="en-US" sz="1600" dirty="0"/>
+          </a:p>
+        </p:txBody>
+      </p:sp>
+      <p:sp>
+        <p:nvSpPr>
+          <p:cNvPr id="3" name="Text 1"/>
+          <p:cNvSpPr/>
+          <p:nvPr/>
+        </p:nvSpPr>
+        <p:spPr>
+          <a:xfrm>
+            <a:off x="10428855" y="677267"/>
+            <a:ext cx="828444" cy="284361"/>
+          </a:xfrm>
+          <a:prstGeom prst="rect">
+            <a:avLst/>
+          </a:prstGeom>
+          <a:noFill/>
+          <a:ln/>
+        </p:spPr>
+        <p:txBody>
+          <a:bodyPr wrap="square" lIns="0" tIns="0" rIns="0" bIns="0" rtlCol="0" anchor="t"/>
+          <a:lstStyle/>
+          <a:p>
+            <a:pPr algn="l" indent="0" marL="0">
+              <a:lnSpc>
+                <a:spcPts val="2240"/>
+              </a:lnSpc>
+              <a:buNone/>
+            </a:pPr>
+            <a:r>
+              <a:rPr lang="en-US" sz="1600" b="1" dirty="0">
+                <a:solidFill>
+                  <a:srgbClr val="8A8170"/>
+                </a:solidFill>
+                <a:latin typeface="Work Sans" pitchFamily="34" charset="0"/>
+                <a:ea typeface="Work Sans" pitchFamily="34" charset="-122"/>
+                <a:cs typeface="Work Sans" pitchFamily="34" charset="-120"/>
+              </a:rPr>
+              <a:t>05 / 05</a:t>
+            </a:r>
+            <a:endParaRPr lang="en-US" sz="1600" dirty="0"/>
+          </a:p>
+        </p:txBody>
+      </p:sp>
+      <p:sp>
+        <p:nvSpPr>
+          <p:cNvPr id="4" name="Text 2"/>
+          <p:cNvSpPr/>
+          <p:nvPr/>
+        </p:nvSpPr>
+        <p:spPr>
+          <a:xfrm>
+            <a:off x="947897" y="1198563"/>
+            <a:ext cx="10499020" cy="609600"/>
+          </a:xfrm>
+          <a:prstGeom prst="rect">
+            <a:avLst/>
+          </a:prstGeom>
+          <a:noFill/>
+          <a:ln/>
+        </p:spPr>
+        <p:txBody>
+          <a:bodyPr wrap="square" lIns="0" tIns="0" rIns="0" bIns="0" rtlCol="0" anchor="t"/>
+          <a:lstStyle/>
+          <a:p>
+            <a:pPr algn="l" indent="0" marL="0">
+              <a:lnSpc>
+                <a:spcPts val="4799"/>
+              </a:lnSpc>
+              <a:spcAft>
+                <a:spcPts val="1600"/>
+              </a:spcAft>
+              <a:buNone/>
+            </a:pPr>
+            <a:r>
+              <a:rPr lang="en-US" sz="3999" dirty="0">
+                <a:solidFill>
+                  <a:srgbClr val="3D3528"/>
+                </a:solidFill>
+                <a:latin typeface="Work Sans" pitchFamily="34" charset="0"/>
+                <a:ea typeface="Work Sans" pitchFamily="34" charset="-122"/>
+                <a:cs typeface="Work Sans" pitchFamily="34" charset="-120"/>
+              </a:rPr>
+              <a:t>What we need to decide</a:t>
+            </a:r>
+            <a:endParaRPr lang="en-US" sz="3999" dirty="0"/>
+          </a:p>
+        </p:txBody>
+      </p:sp>
+      <p:sp>
+        <p:nvSpPr>
+          <p:cNvPr id="5" name="Text 3"/>
+          <p:cNvSpPr/>
+          <p:nvPr/>
+        </p:nvSpPr>
+        <p:spPr>
+          <a:xfrm>
+            <a:off x="947897" y="2011363"/>
+            <a:ext cx="4977354" cy="2571353"/>
+          </a:xfrm>
+          <a:prstGeom prst="roundRect">
+            <a:avLst>
+              <a:gd name="adj" fmla="val 5926"/>
+            </a:avLst>
+          </a:prstGeom>
+          <a:noFill/>
+          <a:ln w="12698">
+            <a:solidFill>
+              <a:srgbClr val="3D3528"/>
+            </a:solidFill>
+          </a:ln>
+        </p:spPr>
+        <p:txBody>
+          <a:bodyPr wrap="square" rtlCol="0" anchor="ctr"/>
+          <a:lstStyle/>
+          <a:p>
+            <a:pPr indent="0" marL="0">
+              <a:buNone/>
+            </a:pPr>
+            <a:endParaRPr lang="en-US" dirty="0"/>
+          </a:p>
+        </p:txBody>
+      </p:sp>
+      <p:sp>
+        <p:nvSpPr>
+          <p:cNvPr id="6" name="Text 4"/>
+          <p:cNvSpPr/>
+          <p:nvPr/>
+        </p:nvSpPr>
+        <p:spPr>
+          <a:xfrm>
+            <a:off x="1163743" y="2227263"/>
+            <a:ext cx="4636575" cy="284361"/>
+          </a:xfrm>
+          <a:prstGeom prst="rect">
+            <a:avLst/>
+          </a:prstGeom>
+          <a:noFill/>
+          <a:ln/>
+        </p:spPr>
+        <p:txBody>
+          <a:bodyPr wrap="square" lIns="0" tIns="0" rIns="0" bIns="0" rtlCol="0" anchor="t"/>
+          <a:lstStyle/>
+          <a:p>
+            <a:pPr algn="l" indent="0" marL="0">
+              <a:lnSpc>
+                <a:spcPts val="2240"/>
+              </a:lnSpc>
+              <a:spcAft>
+                <a:spcPts val="1067"/>
+              </a:spcAft>
+              <a:buNone/>
+            </a:pPr>
+            <a:r>
+              <a:rPr lang="en-US" sz="1600" b="1" dirty="0">
+                <a:solidFill>
+                  <a:srgbClr val="C2693F"/>
+                </a:solidFill>
+                <a:latin typeface="Work Sans" pitchFamily="34" charset="0"/>
+                <a:ea typeface="Work Sans" pitchFamily="34" charset="-122"/>
+                <a:cs typeface="Work Sans" pitchFamily="34" charset="-120"/>
+              </a:rPr>
+              <a:t>DECISION ONE</a:t>
+            </a:r>
+            <a:endParaRPr lang="en-US" sz="1600" dirty="0"/>
+          </a:p>
+        </p:txBody>
+      </p:sp>
+      <p:sp>
+        <p:nvSpPr>
+          <p:cNvPr id="7" name="Text 5"/>
+          <p:cNvSpPr/>
+          <p:nvPr/>
+        </p:nvSpPr>
+        <p:spPr>
+          <a:xfrm>
+            <a:off x="1163743" y="2646958"/>
+            <a:ext cx="4636575" cy="411361"/>
+          </a:xfrm>
+          <a:prstGeom prst="rect">
+            <a:avLst/>
+          </a:prstGeom>
+          <a:noFill/>
+          <a:ln/>
+        </p:spPr>
+        <p:txBody>
+          <a:bodyPr wrap="square" lIns="0" tIns="0" rIns="0" bIns="0" rtlCol="0" anchor="t"/>
+          <a:lstStyle/>
+          <a:p>
+            <a:pPr algn="l" indent="0" marL="0">
+              <a:lnSpc>
+                <a:spcPts val="3240"/>
+              </a:lnSpc>
+              <a:spcAft>
+                <a:spcPts val="1333"/>
+              </a:spcAft>
+              <a:buNone/>
+            </a:pPr>
+            <a:r>
+              <a:rPr lang="en-US" sz="2400" dirty="0">
+                <a:solidFill>
+                  <a:srgbClr val="3D3528"/>
+                </a:solidFill>
+                <a:latin typeface="Work Sans" pitchFamily="34" charset="0"/>
+                <a:ea typeface="Work Sans" pitchFamily="34" charset="-122"/>
+                <a:cs typeface="Work Sans" pitchFamily="34" charset="-120"/>
+              </a:rPr>
+              <a:t>What is the minimum roster?</a:t>
+            </a:r>
+            <a:endParaRPr lang="en-US" sz="2400" dirty="0"/>
+          </a:p>
+        </p:txBody>
+      </p:sp>
+      <p:sp>
+        <p:nvSpPr>
+          <p:cNvPr id="8" name="Text 6"/>
+          <p:cNvSpPr/>
+          <p:nvPr/>
+        </p:nvSpPr>
+        <p:spPr>
+          <a:xfrm>
+            <a:off x="1163743" y="3227586"/>
+            <a:ext cx="4636575" cy="1031081"/>
+          </a:xfrm>
+          <a:prstGeom prst="rect">
+            <a:avLst/>
+          </a:prstGeom>
+          <a:noFill/>
+          <a:ln/>
+        </p:spPr>
+        <p:txBody>
+          <a:bodyPr wrap="square" lIns="0" tIns="0" rIns="0" bIns="0" rtlCol="0" anchor="t"/>
+          <a:lstStyle/>
+          <a:p>
+            <a:pPr algn="l" indent="0" marL="0">
+              <a:lnSpc>
+                <a:spcPts val="2706"/>
+              </a:lnSpc>
+              <a:buNone/>
+            </a:pPr>
+            <a:r>
+              <a:rPr lang="en-US" sz="1866" dirty="0">
+                <a:solidFill>
+                  <a:srgbClr val="3D3528"/>
+                </a:solidFill>
+                <a:latin typeface="Work Sans" pitchFamily="34" charset="0"/>
+                <a:ea typeface="Work Sans" pitchFamily="34" charset="-122"/>
+                <a:cs typeface="Work Sans" pitchFamily="34" charset="-120"/>
+              </a:rPr>
+              <a:t>The size below which shift length, handover, pay and the night ceiling cannot all hold at once.</a:t>
+            </a:r>
+            <a:endParaRPr lang="en-US" sz="1866" dirty="0"/>
+          </a:p>
+        </p:txBody>
+      </p:sp>
+      <p:sp>
+        <p:nvSpPr>
+          <p:cNvPr id="9" name="Text 7"/>
+          <p:cNvSpPr/>
+          <p:nvPr/>
+        </p:nvSpPr>
+        <p:spPr>
+          <a:xfrm>
+            <a:off x="6263701" y="2011363"/>
+            <a:ext cx="4977354" cy="2571353"/>
+          </a:xfrm>
+          <a:prstGeom prst="roundRect">
+            <a:avLst>
+              <a:gd name="adj" fmla="val 5926"/>
+            </a:avLst>
+          </a:prstGeom>
+          <a:noFill/>
+          <a:ln w="12698">
+            <a:solidFill>
+              <a:srgbClr val="3D3528"/>
+            </a:solidFill>
+          </a:ln>
+        </p:spPr>
+        <p:txBody>
+          <a:bodyPr wrap="square" rtlCol="0" anchor="ctr"/>
+          <a:lstStyle/>
+          <a:p>
+            <a:pPr indent="0" marL="0">
+              <a:buNone/>
+            </a:pPr>
+            <a:endParaRPr lang="en-US" dirty="0"/>
+          </a:p>
+        </p:txBody>
+      </p:sp>
+      <p:sp>
+        <p:nvSpPr>
+          <p:cNvPr id="10" name="Text 8"/>
+          <p:cNvSpPr/>
+          <p:nvPr/>
+        </p:nvSpPr>
+        <p:spPr>
+          <a:xfrm>
+            <a:off x="6479547" y="2227263"/>
+            <a:ext cx="4636575" cy="284361"/>
+          </a:xfrm>
+          <a:prstGeom prst="rect">
+            <a:avLst/>
+          </a:prstGeom>
+          <a:noFill/>
+          <a:ln/>
+        </p:spPr>
+        <p:txBody>
+          <a:bodyPr wrap="square" lIns="0" tIns="0" rIns="0" bIns="0" rtlCol="0" anchor="t"/>
+          <a:lstStyle/>
+          <a:p>
+            <a:pPr algn="l" indent="0" marL="0">
+              <a:lnSpc>
+                <a:spcPts val="2240"/>
+              </a:lnSpc>
+              <a:spcAft>
+                <a:spcPts val="1067"/>
+              </a:spcAft>
+              <a:buNone/>
+            </a:pPr>
+            <a:r>
+              <a:rPr lang="en-US" sz="1600" b="1" dirty="0">
+                <a:solidFill>
+                  <a:srgbClr val="C2693F"/>
+                </a:solidFill>
+                <a:latin typeface="Work Sans" pitchFamily="34" charset="0"/>
+                <a:ea typeface="Work Sans" pitchFamily="34" charset="-122"/>
+                <a:cs typeface="Work Sans" pitchFamily="34" charset="-120"/>
+              </a:rPr>
+              <a:t>DECISION TWO</a:t>
+            </a:r>
+            <a:endParaRPr lang="en-US" sz="1600" dirty="0"/>
+          </a:p>
+        </p:txBody>
+      </p:sp>
+      <p:sp>
+        <p:nvSpPr>
+          <p:cNvPr id="11" name="Text 9"/>
+          <p:cNvSpPr/>
+          <p:nvPr/>
+        </p:nvSpPr>
+        <p:spPr>
+          <a:xfrm>
+            <a:off x="6479547" y="2646958"/>
+            <a:ext cx="4636575" cy="411361"/>
+          </a:xfrm>
+          <a:prstGeom prst="rect">
+            <a:avLst/>
+          </a:prstGeom>
+          <a:noFill/>
+          <a:ln/>
+        </p:spPr>
+        <p:txBody>
+          <a:bodyPr wrap="square" lIns="0" tIns="0" rIns="0" bIns="0" rtlCol="0" anchor="t"/>
+          <a:lstStyle/>
+          <a:p>
+            <a:pPr algn="l" indent="0" marL="0">
+              <a:lnSpc>
+                <a:spcPts val="3240"/>
+              </a:lnSpc>
+              <a:spcAft>
+                <a:spcPts val="1333"/>
+              </a:spcAft>
+              <a:buNone/>
+            </a:pPr>
+            <a:r>
+              <a:rPr lang="en-US" sz="2400" dirty="0">
+                <a:solidFill>
+                  <a:srgbClr val="3D3528"/>
+                </a:solidFill>
+                <a:latin typeface="Work Sans" pitchFamily="34" charset="0"/>
+                <a:ea typeface="Work Sans" pitchFamily="34" charset="-122"/>
+                <a:cs typeface="Work Sans" pitchFamily="34" charset="-120"/>
+              </a:rPr>
+              <a:t>What do we give up below it?</a:t>
+            </a:r>
+            <a:endParaRPr lang="en-US" sz="2400" dirty="0"/>
+          </a:p>
+        </p:txBody>
+      </p:sp>
+      <p:sp>
+        <p:nvSpPr>
+          <p:cNvPr id="12" name="Text 10"/>
+          <p:cNvSpPr/>
+          <p:nvPr/>
+        </p:nvSpPr>
+        <p:spPr>
+          <a:xfrm>
+            <a:off x="6479547" y="3227586"/>
+            <a:ext cx="4636575" cy="1031081"/>
+          </a:xfrm>
+          <a:prstGeom prst="rect">
+            <a:avLst/>
+          </a:prstGeom>
+          <a:noFill/>
+          <a:ln/>
+        </p:spPr>
+        <p:txBody>
+          <a:bodyPr wrap="square" lIns="0" tIns="0" rIns="0" bIns="0" rtlCol="0" anchor="t"/>
+          <a:lstStyle/>
+          <a:p>
+            <a:pPr algn="l" indent="0" marL="0">
+              <a:lnSpc>
+                <a:spcPts val="2706"/>
+              </a:lnSpc>
+              <a:buNone/>
+            </a:pPr>
+            <a:r>
+              <a:rPr lang="en-US" sz="1866" dirty="0">
+                <a:solidFill>
+                  <a:srgbClr val="3D3528"/>
+                </a:solidFill>
+                <a:latin typeface="Work Sans" pitchFamily="34" charset="0"/>
+                <a:ea typeface="Work Sans" pitchFamily="34" charset="-122"/>
+                <a:cs typeface="Work Sans" pitchFamily="34" charset="-120"/>
+              </a:rPr>
+              <a:t>Name the lever we suspend, for how long, and what pulls it back — before the rota picks for us.</a:t>
+            </a:r>
+            <a:endParaRPr lang="en-US" sz="1866" dirty="0"/>
+          </a:p>
+        </p:txBody>
+      </p:sp>
+      <p:sp>
+        <p:nvSpPr>
+          <p:cNvPr id="13" name="Text 11"/>
+          <p:cNvSpPr/>
+          <p:nvPr/>
+        </p:nvSpPr>
+        <p:spPr>
+          <a:xfrm>
+            <a:off x="947897" y="4853583"/>
+            <a:ext cx="10293157" cy="16867"/>
+          </a:xfrm>
+          <a:prstGeom prst="rect">
+            <a:avLst/>
+          </a:prstGeom>
+          <a:solidFill>
+            <a:srgbClr val="C2693F"/>
+          </a:solidFill>
+          <a:ln/>
+        </p:spPr>
+        <p:txBody>
+          <a:bodyPr wrap="square" rtlCol="0" anchor="ctr"/>
+          <a:lstStyle/>
+          <a:p>
+            <a:pPr indent="0" marL="0">
+              <a:buNone/>
+            </a:pPr>
+            <a:endParaRPr lang="en-US" dirty="0"/>
+          </a:p>
+        </p:txBody>
+      </p:sp>
+      <p:sp>
+        <p:nvSpPr>
+          <p:cNvPr id="14" name="Text 12"/>
+          <p:cNvSpPr/>
+          <p:nvPr/>
+        </p:nvSpPr>
+        <p:spPr>
+          <a:xfrm>
+            <a:off x="947897" y="5073650"/>
+            <a:ext cx="10499020" cy="474067"/>
+          </a:xfrm>
+          <a:prstGeom prst="rect">
+            <a:avLst/>
+          </a:prstGeom>
+          <a:noFill/>
+          <a:ln/>
+        </p:spPr>
+        <p:txBody>
+          <a:bodyPr wrap="square" lIns="0" tIns="0" rIns="0" bIns="0" rtlCol="0" anchor="t"/>
+          <a:lstStyle/>
+          <a:p>
+            <a:pPr algn="l" indent="0" marL="0">
+              <a:lnSpc>
+                <a:spcPts val="3733"/>
+              </a:lnSpc>
+              <a:spcBef>
+                <a:spcPts val="1600"/>
+              </a:spcBef>
+              <a:buNone/>
+            </a:pPr>
+            <a:r>
+              <a:rPr lang="en-US" sz="2666" dirty="0">
+                <a:solidFill>
+                  <a:srgbClr val="3D3528"/>
+                </a:solidFill>
+                <a:latin typeface="Work Sans" pitchFamily="34" charset="0"/>
+                <a:ea typeface="Work Sans" pitchFamily="34" charset="-122"/>
+                <a:cs typeface="Work Sans" pitchFamily="34" charset="-120"/>
+              </a:rPr>
+              <a:t>Below the floor, something is given up — chosen or not.</a:t>
+            </a:r>
+            <a:endParaRPr lang="en-US" sz="2666" dirty="0"/>
+          </a:p>
+        </p:txBody>
+      </p:sp>
+      <p:sp>
+        <p:nvSpPr>
+          <p:cNvPr id="15" name="Text 13"/>
+          <p:cNvSpPr/>
+          <p:nvPr/>
+        </p:nvSpPr>
+        <p:spPr>
+          <a:xfrm>
+            <a:off x="947897" y="5784652"/>
+            <a:ext cx="10293157" cy="16867"/>
+          </a:xfrm>
+          <a:prstGeom prst="rect">
+            <a:avLst/>
+          </a:prstGeom>
+          <a:solidFill>
+            <a:srgbClr val="D6CCB8"/>
+          </a:solidFill>
+          <a:ln/>
+        </p:spPr>
+        <p:txBody>
+          <a:bodyPr wrap="square" rtlCol="0" anchor="ctr"/>
+          <a:lstStyle/>
+          <a:p>
+            <a:pPr indent="0" marL="0">
+              <a:buNone/>
+            </a:pPr>
+            <a:endParaRPr lang="en-US" dirty="0"/>
+          </a:p>
+        </p:txBody>
+      </p:sp>
+      <p:sp>
+        <p:nvSpPr>
+          <p:cNvPr id="16" name="Text 14"/>
+          <p:cNvSpPr/>
+          <p:nvPr/>
+        </p:nvSpPr>
+        <p:spPr>
+          <a:xfrm>
+            <a:off x="947897" y="5919986"/>
+            <a:ext cx="10499020" cy="260747"/>
+          </a:xfrm>
+          <a:prstGeom prst="rect">
+            <a:avLst/>
+          </a:prstGeom>
+          <a:noFill/>
+          <a:ln/>
+        </p:spPr>
+        <p:txBody>
+          <a:bodyPr wrap="square" lIns="0" tIns="0" rIns="0" bIns="0" rtlCol="0" anchor="t"/>
+          <a:lstStyle/>
+          <a:p>
+            <a:pPr algn="l" indent="0" marL="0">
+              <a:lnSpc>
+                <a:spcPts val="2053"/>
+              </a:lnSpc>
+              <a:spcBef>
+                <a:spcPts val="933"/>
+              </a:spcBef>
+              <a:buNone/>
+            </a:pPr>
+            <a:r>
+              <a:rPr lang="en-US" sz="1466" dirty="0">
+                <a:solidFill>
+                  <a:srgbClr val="3D3528"/>
+                </a:solidFill>
+                <a:latin typeface="Work Sans" pitchFamily="34" charset="0"/>
+                <a:ea typeface="Work Sans" pitchFamily="34" charset="-122"/>
+                <a:cs typeface="Work Sans" pitchFamily="34" charset="-120"/>
+              </a:rPr>
+              <a:t>No sourced figures: shift hours, page rates and roster sizes are unsourced.</a:t>
+            </a:r>
+            <a:endParaRPr lang="en-US" sz="1466" dirty="0"/>
+          </a:p>
+        </p:txBody>
+      </p:sp>
     </p:spTree>
   </p:cSld>
   <p:clrMapOvr>

--- a/decks/oncall-rotation/oncall-rotation.pptx
+++ b/decks/oncall-rotation/oncall-rotation.pptx
@@ -1552,6 +1552,51 @@
         </p:nvSpPr>
         <p:spPr>
           <a:xfrm>
+            <a:off x="8404766" y="4614267"/>
+            <a:ext cx="2421792" cy="260747"/>
+          </a:xfrm>
+          <a:prstGeom prst="rect">
+            <a:avLst/>
+          </a:prstGeom>
+          <a:noFill/>
+          <a:ln/>
+        </p:spPr>
+        <p:txBody>
+          <a:bodyPr wrap="square" lIns="0" tIns="0" rIns="0" bIns="0" rtlCol="0" anchor="t"/>
+          <a:lstStyle/>
+          <a:p>
+            <a:pPr algn="ctr" indent="0" marL="0">
+              <a:lnSpc>
+                <a:spcPts val="2053"/>
+              </a:lnSpc>
+              <a:spcBef>
+                <a:spcPts val="1333"/>
+              </a:spcBef>
+              <a:buNone/>
+            </a:pPr>
+            <a:r>
+              <a:rPr lang="en-US" sz="1466" dirty="0">
+                <a:solidFill>
+                  <a:srgbClr val="3D3528"/>
+                </a:solidFill>
+                <a:latin typeface="Work Sans" pitchFamily="34" charset="0"/>
+                <a:ea typeface="Work Sans" pitchFamily="34" charset="-122"/>
+                <a:cs typeface="Work Sans" pitchFamily="34" charset="-120"/>
+              </a:rPr>
+              <a:t>One shift. Two handovers.</a:t>
+            </a:r>
+            <a:endParaRPr lang="en-US" sz="1466" dirty="0"/>
+          </a:p>
+        </p:txBody>
+      </p:sp>
+      <p:sp>
+        <p:nvSpPr>
+          <p:cNvPr id="10" name="Text 7"/>
+          <p:cNvSpPr/>
+          <p:nvPr/>
+        </p:nvSpPr>
+        <p:spPr>
+          <a:xfrm>
             <a:off x="947897" y="5784652"/>
             <a:ext cx="10293157" cy="16867"/>
           </a:xfrm>
@@ -1576,7 +1621,7 @@
       </p:sp>
       <p:sp>
         <p:nvSpPr>
-          <p:cNvPr id="10" name="Text 7"/>
+          <p:cNvPr id="11" name="Text 8"/>
           <p:cNvSpPr/>
           <p:nvPr/>
         </p:nvSpPr>

--- a/decks/oncall-rotation/oncall-rotation.pptx
+++ b/decks/oncall-rotation/oncall-rotation.pptx
@@ -1249,7 +1249,7 @@
           <a:ln/>
         </p:spPr>
         <p:txBody>
-          <a:bodyPr wrap="square" lIns="0" tIns="0" rIns="0" bIns="0" rtlCol="0" anchor="t"/>
+          <a:bodyPr wrap="none" lIns="0" tIns="0" rIns="0" bIns="0" rtlCol="0" anchor="t"/>
           <a:lstStyle/>
           <a:p>
             <a:pPr algn="l" indent="0" marL="0">
@@ -1291,7 +1291,7 @@
           <a:ln/>
         </p:spPr>
         <p:txBody>
-          <a:bodyPr wrap="square" lIns="0" tIns="0" rIns="0" bIns="0" rtlCol="0" anchor="t"/>
+          <a:bodyPr wrap="none" lIns="0" tIns="0" rIns="0" bIns="0" rtlCol="0" anchor="t"/>
           <a:lstStyle/>
           <a:p>
             <a:pPr algn="l" indent="0" marL="0">
@@ -1333,7 +1333,9 @@
           <a:ln/>
         </p:spPr>
         <p:txBody>
-          <a:bodyPr wrap="square" lIns="0" tIns="0" rIns="0" bIns="0" rtlCol="0" anchor="t"/>
+          <a:bodyPr wrap="square" lIns="0" tIns="0" rIns="0" bIns="0" rtlCol="0" anchor="t">
+            <a:normAutofit/>
+          </a:bodyPr>
           <a:lstStyle/>
           <a:p>
             <a:pPr algn="l" indent="0" marL="0">
@@ -1425,7 +1427,9 @@
           <a:ln/>
         </p:spPr>
         <p:txBody>
-          <a:bodyPr wrap="square" lIns="0" tIns="0" rIns="0" bIns="0" rtlCol="0" anchor="t"/>
+          <a:bodyPr wrap="square" lIns="0" tIns="0" rIns="0" bIns="0" rtlCol="0" anchor="t">
+            <a:normAutofit/>
+          </a:bodyPr>
           <a:lstStyle/>
           <a:p>
             <a:pPr algn="l" indent="0" marL="0">
@@ -1487,7 +1491,7 @@
           <a:ln/>
         </p:spPr>
         <p:txBody>
-          <a:bodyPr wrap="square" lIns="0" tIns="0" rIns="0" bIns="0" rtlCol="0" anchor="t"/>
+          <a:bodyPr wrap="none" lIns="0" tIns="0" rIns="0" bIns="0" rtlCol="0" anchor="t"/>
           <a:lstStyle/>
           <a:p>
             <a:pPr algn="l" indent="0" marL="0">
@@ -1562,7 +1566,7 @@
           <a:ln/>
         </p:spPr>
         <p:txBody>
-          <a:bodyPr wrap="square" lIns="0" tIns="0" rIns="0" bIns="0" rtlCol="0" anchor="t"/>
+          <a:bodyPr wrap="none" lIns="0" tIns="0" rIns="0" bIns="0" rtlCol="0" anchor="t"/>
           <a:lstStyle/>
           <a:p>
             <a:pPr algn="ctr" indent="0" marL="0">
@@ -1637,7 +1641,7 @@
           <a:ln/>
         </p:spPr>
         <p:txBody>
-          <a:bodyPr wrap="square" lIns="0" tIns="0" rIns="0" bIns="0" rtlCol="0" anchor="t"/>
+          <a:bodyPr wrap="none" lIns="0" tIns="0" rIns="0" bIns="0" rtlCol="0" anchor="t"/>
           <a:lstStyle/>
           <a:p>
             <a:pPr algn="l" indent="0" marL="0">
@@ -1714,7 +1718,7 @@
           <a:ln/>
         </p:spPr>
         <p:txBody>
-          <a:bodyPr wrap="square" lIns="0" tIns="0" rIns="0" bIns="0" rtlCol="0" anchor="t"/>
+          <a:bodyPr wrap="none" lIns="0" tIns="0" rIns="0" bIns="0" rtlCol="0" anchor="t"/>
           <a:lstStyle/>
           <a:p>
             <a:pPr algn="l" indent="0" marL="0">
@@ -1756,7 +1760,7 @@
           <a:ln/>
         </p:spPr>
         <p:txBody>
-          <a:bodyPr wrap="square" lIns="0" tIns="0" rIns="0" bIns="0" rtlCol="0" anchor="t"/>
+          <a:bodyPr wrap="none" lIns="0" tIns="0" rIns="0" bIns="0" rtlCol="0" anchor="t"/>
           <a:lstStyle/>
           <a:p>
             <a:pPr algn="l" indent="0" marL="0">
@@ -1798,7 +1802,7 @@
           <a:ln/>
         </p:spPr>
         <p:txBody>
-          <a:bodyPr wrap="square" lIns="0" tIns="0" rIns="0" bIns="0" rtlCol="0" anchor="t"/>
+          <a:bodyPr wrap="none" lIns="0" tIns="0" rIns="0" bIns="0" rtlCol="0" anchor="t"/>
           <a:lstStyle/>
           <a:p>
             <a:pPr algn="l" indent="0" marL="0">
@@ -1909,7 +1913,7 @@
           <a:ln/>
         </p:spPr>
         <p:txBody>
-          <a:bodyPr wrap="square" lIns="0" tIns="0" rIns="0" bIns="0" rtlCol="0" anchor="t"/>
+          <a:bodyPr wrap="none" lIns="0" tIns="0" rIns="0" bIns="0" rtlCol="0" anchor="t"/>
           <a:lstStyle/>
           <a:p>
             <a:pPr algn="l" indent="0" marL="0">
@@ -1951,7 +1955,7 @@
           <a:ln/>
         </p:spPr>
         <p:txBody>
-          <a:bodyPr wrap="square" lIns="0" tIns="0" rIns="0" bIns="0" rtlCol="0" anchor="t"/>
+          <a:bodyPr wrap="none" lIns="0" tIns="0" rIns="0" bIns="0" rtlCol="0" anchor="t"/>
           <a:lstStyle/>
           <a:p>
             <a:pPr algn="l" indent="0" marL="0">
@@ -1993,7 +1997,7 @@
           <a:ln/>
         </p:spPr>
         <p:txBody>
-          <a:bodyPr wrap="square" lIns="0" tIns="0" rIns="0" bIns="0" rtlCol="0" anchor="t"/>
+          <a:bodyPr wrap="none" lIns="0" tIns="0" rIns="0" bIns="0" rtlCol="0" anchor="t"/>
           <a:lstStyle/>
           <a:p>
             <a:pPr algn="l" indent="0" marL="0">
@@ -2104,7 +2108,7 @@
           <a:ln/>
         </p:spPr>
         <p:txBody>
-          <a:bodyPr wrap="square" lIns="0" tIns="0" rIns="0" bIns="0" rtlCol="0" anchor="t"/>
+          <a:bodyPr wrap="none" lIns="0" tIns="0" rIns="0" bIns="0" rtlCol="0" anchor="t"/>
           <a:lstStyle/>
           <a:p>
             <a:pPr algn="l" indent="0" marL="0">
@@ -2146,7 +2150,7 @@
           <a:ln/>
         </p:spPr>
         <p:txBody>
-          <a:bodyPr wrap="square" lIns="0" tIns="0" rIns="0" bIns="0" rtlCol="0" anchor="t"/>
+          <a:bodyPr wrap="none" lIns="0" tIns="0" rIns="0" bIns="0" rtlCol="0" anchor="t"/>
           <a:lstStyle/>
           <a:p>
             <a:pPr algn="l" indent="0" marL="0">
@@ -2188,7 +2192,7 @@
           <a:ln/>
         </p:spPr>
         <p:txBody>
-          <a:bodyPr wrap="square" lIns="0" tIns="0" rIns="0" bIns="0" rtlCol="0" anchor="t"/>
+          <a:bodyPr wrap="none" lIns="0" tIns="0" rIns="0" bIns="0" rtlCol="0" anchor="t"/>
           <a:lstStyle/>
           <a:p>
             <a:pPr algn="l" indent="0" marL="0">
@@ -2299,7 +2303,7 @@
           <a:ln/>
         </p:spPr>
         <p:txBody>
-          <a:bodyPr wrap="square" lIns="0" tIns="0" rIns="0" bIns="0" rtlCol="0" anchor="t"/>
+          <a:bodyPr wrap="none" lIns="0" tIns="0" rIns="0" bIns="0" rtlCol="0" anchor="t"/>
           <a:lstStyle/>
           <a:p>
             <a:pPr algn="l" indent="0" marL="0">
@@ -2341,7 +2345,7 @@
           <a:ln/>
         </p:spPr>
         <p:txBody>
-          <a:bodyPr wrap="square" lIns="0" tIns="0" rIns="0" bIns="0" rtlCol="0" anchor="t"/>
+          <a:bodyPr wrap="none" lIns="0" tIns="0" rIns="0" bIns="0" rtlCol="0" anchor="t"/>
           <a:lstStyle/>
           <a:p>
             <a:pPr algn="l" indent="0" marL="0">
@@ -2383,7 +2387,7 @@
           <a:ln/>
         </p:spPr>
         <p:txBody>
-          <a:bodyPr wrap="square" lIns="0" tIns="0" rIns="0" bIns="0" rtlCol="0" anchor="t"/>
+          <a:bodyPr wrap="none" lIns="0" tIns="0" rIns="0" bIns="0" rtlCol="0" anchor="t"/>
           <a:lstStyle/>
           <a:p>
             <a:pPr algn="l" indent="0" marL="0">
@@ -2494,7 +2498,7 @@
           <a:ln/>
         </p:spPr>
         <p:txBody>
-          <a:bodyPr wrap="square" lIns="0" tIns="0" rIns="0" bIns="0" rtlCol="0" anchor="t"/>
+          <a:bodyPr wrap="none" lIns="0" tIns="0" rIns="0" bIns="0" rtlCol="0" anchor="t"/>
           <a:lstStyle/>
           <a:p>
             <a:pPr algn="l" indent="0" marL="0">
@@ -2536,7 +2540,7 @@
           <a:ln/>
         </p:spPr>
         <p:txBody>
-          <a:bodyPr wrap="square" lIns="0" tIns="0" rIns="0" bIns="0" rtlCol="0" anchor="t"/>
+          <a:bodyPr wrap="none" lIns="0" tIns="0" rIns="0" bIns="0" rtlCol="0" anchor="t"/>
           <a:lstStyle/>
           <a:p>
             <a:pPr algn="l" indent="0" marL="0">
@@ -2578,7 +2582,7 @@
           <a:ln/>
         </p:spPr>
         <p:txBody>
-          <a:bodyPr wrap="square" lIns="0" tIns="0" rIns="0" bIns="0" rtlCol="0" anchor="t"/>
+          <a:bodyPr wrap="none" lIns="0" tIns="0" rIns="0" bIns="0" rtlCol="0" anchor="t"/>
           <a:lstStyle/>
           <a:p>
             <a:pPr algn="l" indent="0" marL="0">
@@ -2653,7 +2657,7 @@
           <a:ln/>
         </p:spPr>
         <p:txBody>
-          <a:bodyPr wrap="square" lIns="0" tIns="0" rIns="0" bIns="0" rtlCol="0" anchor="t"/>
+          <a:bodyPr wrap="none" lIns="0" tIns="0" rIns="0" bIns="0" rtlCol="0" anchor="t"/>
           <a:lstStyle/>
           <a:p>
             <a:pPr algn="l" indent="0" marL="0">
@@ -2728,7 +2732,7 @@
           <a:ln/>
         </p:spPr>
         <p:txBody>
-          <a:bodyPr wrap="square" lIns="0" tIns="0" rIns="0" bIns="0" rtlCol="0" anchor="t"/>
+          <a:bodyPr wrap="none" lIns="0" tIns="0" rIns="0" bIns="0" rtlCol="0" anchor="t"/>
           <a:lstStyle/>
           <a:p>
             <a:pPr algn="l" indent="0" marL="0">
@@ -2805,7 +2809,7 @@
           <a:ln/>
         </p:spPr>
         <p:txBody>
-          <a:bodyPr wrap="square" lIns="0" tIns="0" rIns="0" bIns="0" rtlCol="0" anchor="t"/>
+          <a:bodyPr wrap="none" lIns="0" tIns="0" rIns="0" bIns="0" rtlCol="0" anchor="t"/>
           <a:lstStyle/>
           <a:p>
             <a:pPr algn="l" indent="0" marL="0">
@@ -2847,7 +2851,7 @@
           <a:ln/>
         </p:spPr>
         <p:txBody>
-          <a:bodyPr wrap="square" lIns="0" tIns="0" rIns="0" bIns="0" rtlCol="0" anchor="t"/>
+          <a:bodyPr wrap="none" lIns="0" tIns="0" rIns="0" bIns="0" rtlCol="0" anchor="t"/>
           <a:lstStyle/>
           <a:p>
             <a:pPr algn="l" indent="0" marL="0">
@@ -2889,7 +2893,7 @@
           <a:ln/>
         </p:spPr>
         <p:txBody>
-          <a:bodyPr wrap="square" lIns="0" tIns="0" rIns="0" bIns="0" rtlCol="0" anchor="t"/>
+          <a:bodyPr wrap="none" lIns="0" tIns="0" rIns="0" bIns="0" rtlCol="0" anchor="t"/>
           <a:lstStyle/>
           <a:p>
             <a:pPr algn="l" indent="0" marL="0">
@@ -2934,7 +2938,7 @@
           <a:ln/>
         </p:spPr>
         <p:txBody>
-          <a:bodyPr wrap="square" lIns="0" tIns="0" rIns="0" bIns="0" rtlCol="0" anchor="t"/>
+          <a:bodyPr wrap="none" lIns="0" tIns="0" rIns="0" bIns="0" rtlCol="0" anchor="t"/>
           <a:lstStyle/>
           <a:p>
             <a:pPr algn="l" indent="0" marL="0">
@@ -2983,6 +2987,10 @@
             <a:prstDash val="solid"/>
           </a:ln>
         </p:spPr>
+        <p:txBody>
+          <a:bodyPr/>
+          <a:p/>
+        </p:txBody>
       </p:sp>
       <p:sp>
         <p:nvSpPr>
@@ -3002,7 +3010,7 @@
           <a:ln/>
         </p:spPr>
         <p:txBody>
-          <a:bodyPr wrap="square" lIns="0" tIns="0" rIns="0" bIns="0" rtlCol="0" anchor="t"/>
+          <a:bodyPr wrap="none" lIns="0" tIns="0" rIns="0" bIns="0" rtlCol="0" anchor="t"/>
           <a:lstStyle/>
           <a:p>
             <a:pPr algn="l" indent="0" marL="0">
@@ -3048,6 +3056,10 @@
             <a:prstDash val="solid"/>
           </a:ln>
         </p:spPr>
+        <p:txBody>
+          <a:bodyPr/>
+          <a:p/>
+        </p:txBody>
       </p:sp>
       <p:sp>
         <p:nvSpPr>
@@ -3067,7 +3079,7 @@
           <a:ln/>
         </p:spPr>
         <p:txBody>
-          <a:bodyPr wrap="square" lIns="0" tIns="0" rIns="0" bIns="0" rtlCol="0" anchor="t"/>
+          <a:bodyPr wrap="none" lIns="0" tIns="0" rIns="0" bIns="0" rtlCol="0" anchor="t"/>
           <a:lstStyle/>
           <a:p>
             <a:pPr algn="l" indent="0" marL="0">
@@ -3113,6 +3125,10 @@
             <a:prstDash val="solid"/>
           </a:ln>
         </p:spPr>
+        <p:txBody>
+          <a:bodyPr/>
+          <a:p/>
+        </p:txBody>
       </p:sp>
       <p:sp>
         <p:nvSpPr>
@@ -3132,7 +3148,7 @@
           <a:ln/>
         </p:spPr>
         <p:txBody>
-          <a:bodyPr wrap="square" lIns="0" tIns="0" rIns="0" bIns="0" rtlCol="0" anchor="t"/>
+          <a:bodyPr wrap="none" lIns="0" tIns="0" rIns="0" bIns="0" rtlCol="0" anchor="t"/>
           <a:lstStyle/>
           <a:p>
             <a:pPr algn="l" indent="0" marL="0">
@@ -3178,6 +3194,10 @@
             <a:prstDash val="solid"/>
           </a:ln>
         </p:spPr>
+        <p:txBody>
+          <a:bodyPr/>
+          <a:p/>
+        </p:txBody>
       </p:sp>
       <p:sp>
         <p:nvSpPr>
@@ -3197,7 +3217,7 @@
           <a:ln/>
         </p:spPr>
         <p:txBody>
-          <a:bodyPr wrap="square" lIns="0" tIns="0" rIns="0" bIns="0" rtlCol="0" anchor="t"/>
+          <a:bodyPr wrap="none" lIns="0" tIns="0" rIns="0" bIns="0" rtlCol="0" anchor="t"/>
           <a:lstStyle/>
           <a:p>
             <a:pPr algn="l" indent="0" marL="0">
@@ -3243,6 +3263,10 @@
             <a:prstDash val="solid"/>
           </a:ln>
         </p:spPr>
+        <p:txBody>
+          <a:bodyPr/>
+          <a:p/>
+        </p:txBody>
       </p:sp>
       <p:sp>
         <p:nvSpPr>
@@ -3262,7 +3286,7 @@
           <a:ln/>
         </p:spPr>
         <p:txBody>
-          <a:bodyPr wrap="square" lIns="0" tIns="0" rIns="0" bIns="0" rtlCol="0" anchor="t"/>
+          <a:bodyPr wrap="none" lIns="0" tIns="0" rIns="0" bIns="0" rtlCol="0" anchor="t"/>
           <a:lstStyle/>
           <a:p>
             <a:pPr algn="l" indent="0" marL="0">
@@ -3334,7 +3358,7 @@
           <a:ln/>
         </p:spPr>
         <p:txBody>
-          <a:bodyPr wrap="square" lIns="0" tIns="0" rIns="0" bIns="0" rtlCol="0" anchor="t"/>
+          <a:bodyPr wrap="none" lIns="0" tIns="0" rIns="0" bIns="0" rtlCol="0" anchor="t"/>
           <a:lstStyle/>
           <a:p>
             <a:pPr algn="l" indent="0" marL="0">
@@ -3379,7 +3403,9 @@
           <a:ln/>
         </p:spPr>
         <p:txBody>
-          <a:bodyPr wrap="square" lIns="0" tIns="0" rIns="0" bIns="0" rtlCol="0" anchor="t"/>
+          <a:bodyPr wrap="square" lIns="0" tIns="0" rIns="0" bIns="0" rtlCol="0" anchor="t">
+            <a:normAutofit/>
+          </a:bodyPr>
           <a:lstStyle/>
           <a:p>
             <a:pPr algn="l" indent="0" marL="0">
@@ -3447,7 +3473,9 @@
           <a:ln/>
         </p:spPr>
         <p:txBody>
-          <a:bodyPr wrap="square" lIns="0" tIns="0" rIns="0" bIns="0" rtlCol="0" anchor="t"/>
+          <a:bodyPr wrap="square" lIns="0" tIns="0" rIns="0" bIns="0" rtlCol="0" anchor="t">
+            <a:normAutofit/>
+          </a:bodyPr>
           <a:lstStyle/>
           <a:p>
             <a:pPr algn="l" indent="0" marL="0">
@@ -3489,7 +3517,9 @@
           <a:ln/>
         </p:spPr>
         <p:txBody>
-          <a:bodyPr wrap="square" lIns="0" tIns="0" rIns="0" bIns="0" rtlCol="0" anchor="t"/>
+          <a:bodyPr wrap="square" lIns="0" tIns="0" rIns="0" bIns="0" rtlCol="0" anchor="t">
+            <a:normAutofit/>
+          </a:bodyPr>
           <a:lstStyle/>
           <a:p>
             <a:pPr algn="l" indent="0" marL="0">
@@ -3564,7 +3594,7 @@
           <a:ln/>
         </p:spPr>
         <p:txBody>
-          <a:bodyPr wrap="square" lIns="0" tIns="0" rIns="0" bIns="0" rtlCol="0" anchor="t"/>
+          <a:bodyPr wrap="none" lIns="0" tIns="0" rIns="0" bIns="0" rtlCol="0" anchor="t"/>
           <a:lstStyle/>
           <a:p>
             <a:pPr algn="l" indent="0" marL="0">
@@ -3641,7 +3671,7 @@
           <a:ln/>
         </p:spPr>
         <p:txBody>
-          <a:bodyPr wrap="square" lIns="0" tIns="0" rIns="0" bIns="0" rtlCol="0" anchor="t"/>
+          <a:bodyPr wrap="none" lIns="0" tIns="0" rIns="0" bIns="0" rtlCol="0" anchor="t"/>
           <a:lstStyle/>
           <a:p>
             <a:pPr algn="l" indent="0" marL="0">
@@ -3683,7 +3713,7 @@
           <a:ln/>
         </p:spPr>
         <p:txBody>
-          <a:bodyPr wrap="square" lIns="0" tIns="0" rIns="0" bIns="0" rtlCol="0" anchor="t"/>
+          <a:bodyPr wrap="none" lIns="0" tIns="0" rIns="0" bIns="0" rtlCol="0" anchor="t"/>
           <a:lstStyle/>
           <a:p>
             <a:pPr algn="l" indent="0" marL="0">
@@ -3725,7 +3755,7 @@
           <a:ln/>
         </p:spPr>
         <p:txBody>
-          <a:bodyPr wrap="square" lIns="0" tIns="0" rIns="0" bIns="0" rtlCol="0" anchor="t"/>
+          <a:bodyPr wrap="none" lIns="0" tIns="0" rIns="0" bIns="0" rtlCol="0" anchor="t"/>
           <a:lstStyle/>
           <a:p>
             <a:pPr algn="l" indent="0" marL="0">
@@ -3770,7 +3800,7 @@
           <a:ln/>
         </p:spPr>
         <p:txBody>
-          <a:bodyPr wrap="square" lIns="0" tIns="0" rIns="0" bIns="0" rtlCol="0" anchor="t"/>
+          <a:bodyPr wrap="none" lIns="0" tIns="0" rIns="0" bIns="0" rtlCol="0" anchor="t"/>
           <a:lstStyle/>
           <a:p>
             <a:pPr algn="l" indent="0" marL="0">
@@ -3881,7 +3911,7 @@
           <a:ln/>
         </p:spPr>
         <p:txBody>
-          <a:bodyPr wrap="square" lIns="0" tIns="0" rIns="0" bIns="0" rtlCol="0" anchor="t"/>
+          <a:bodyPr wrap="none" lIns="0" tIns="0" rIns="0" bIns="0" rtlCol="0" anchor="t"/>
           <a:lstStyle/>
           <a:p>
             <a:pPr algn="l" indent="0" marL="0">
@@ -3923,7 +3953,7 @@
           <a:ln/>
         </p:spPr>
         <p:txBody>
-          <a:bodyPr wrap="square" lIns="0" tIns="0" rIns="0" bIns="0" rtlCol="0" anchor="t"/>
+          <a:bodyPr wrap="none" lIns="0" tIns="0" rIns="0" bIns="0" rtlCol="0" anchor="t"/>
           <a:lstStyle/>
           <a:p>
             <a:pPr algn="l" indent="0" marL="0">
@@ -4061,7 +4091,7 @@
           <a:ln/>
         </p:spPr>
         <p:txBody>
-          <a:bodyPr wrap="square" lIns="0" tIns="0" rIns="0" bIns="0" rtlCol="0" anchor="t"/>
+          <a:bodyPr wrap="none" lIns="0" tIns="0" rIns="0" bIns="0" rtlCol="0" anchor="t"/>
           <a:lstStyle/>
           <a:p>
             <a:pPr algn="l" indent="0" marL="0">
@@ -4103,7 +4133,7 @@
           <a:ln/>
         </p:spPr>
         <p:txBody>
-          <a:bodyPr wrap="square" lIns="0" tIns="0" rIns="0" bIns="0" rtlCol="0" anchor="t"/>
+          <a:bodyPr wrap="none" lIns="0" tIns="0" rIns="0" bIns="0" rtlCol="0" anchor="t"/>
           <a:lstStyle/>
           <a:p>
             <a:pPr algn="l" indent="0" marL="0">
@@ -4241,7 +4271,7 @@
           <a:ln/>
         </p:spPr>
         <p:txBody>
-          <a:bodyPr wrap="square" lIns="0" tIns="0" rIns="0" bIns="0" rtlCol="0" anchor="t"/>
+          <a:bodyPr wrap="none" lIns="0" tIns="0" rIns="0" bIns="0" rtlCol="0" anchor="t"/>
           <a:lstStyle/>
           <a:p>
             <a:pPr algn="l" indent="0" marL="0">
@@ -4283,7 +4313,7 @@
           <a:ln/>
         </p:spPr>
         <p:txBody>
-          <a:bodyPr wrap="square" lIns="0" tIns="0" rIns="0" bIns="0" rtlCol="0" anchor="t"/>
+          <a:bodyPr wrap="none" lIns="0" tIns="0" rIns="0" bIns="0" rtlCol="0" anchor="t"/>
           <a:lstStyle/>
           <a:p>
             <a:pPr algn="l" indent="0" marL="0">
@@ -4329,6 +4359,10 @@
             <a:prstDash val="solid"/>
           </a:ln>
         </p:spPr>
+        <p:txBody>
+          <a:bodyPr/>
+          <a:p/>
+        </p:txBody>
       </p:sp>
       <p:sp>
         <p:nvSpPr>
@@ -4348,7 +4382,7 @@
           <a:ln/>
         </p:spPr>
         <p:txBody>
-          <a:bodyPr wrap="square" lIns="0" tIns="0" rIns="0" bIns="0" rtlCol="0" anchor="t"/>
+          <a:bodyPr wrap="none" lIns="0" tIns="0" rIns="0" bIns="0" rtlCol="0" anchor="t"/>
           <a:lstStyle/>
           <a:p>
             <a:pPr algn="l" indent="0" marL="0">
@@ -4394,6 +4428,10 @@
             <a:prstDash val="solid"/>
           </a:ln>
         </p:spPr>
+        <p:txBody>
+          <a:bodyPr/>
+          <a:p/>
+        </p:txBody>
       </p:sp>
       <p:sp>
         <p:nvSpPr>
@@ -4413,7 +4451,7 @@
           <a:ln/>
         </p:spPr>
         <p:txBody>
-          <a:bodyPr wrap="square" lIns="0" tIns="0" rIns="0" bIns="0" rtlCol="0" anchor="t"/>
+          <a:bodyPr wrap="none" lIns="0" tIns="0" rIns="0" bIns="0" rtlCol="0" anchor="t"/>
           <a:lstStyle/>
           <a:p>
             <a:pPr algn="l" indent="0" marL="0">
@@ -4459,6 +4497,10 @@
             <a:prstDash val="solid"/>
           </a:ln>
         </p:spPr>
+        <p:txBody>
+          <a:bodyPr/>
+          <a:p/>
+        </p:txBody>
       </p:sp>
       <p:sp>
         <p:nvSpPr>
@@ -4478,7 +4520,7 @@
           <a:ln/>
         </p:spPr>
         <p:txBody>
-          <a:bodyPr wrap="square" lIns="0" tIns="0" rIns="0" bIns="0" rtlCol="0" anchor="t"/>
+          <a:bodyPr wrap="none" lIns="0" tIns="0" rIns="0" bIns="0" rtlCol="0" anchor="t"/>
           <a:lstStyle/>
           <a:p>
             <a:pPr algn="l" indent="0" marL="0">
@@ -4550,7 +4592,7 @@
           <a:ln/>
         </p:spPr>
         <p:txBody>
-          <a:bodyPr wrap="square" lIns="0" tIns="0" rIns="0" bIns="0" rtlCol="0" anchor="t"/>
+          <a:bodyPr wrap="none" lIns="0" tIns="0" rIns="0" bIns="0" rtlCol="0" anchor="t"/>
           <a:lstStyle/>
           <a:p>
             <a:pPr algn="l" indent="0" marL="0">
@@ -4627,7 +4669,7 @@
           <a:ln/>
         </p:spPr>
         <p:txBody>
-          <a:bodyPr wrap="square" lIns="0" tIns="0" rIns="0" bIns="0" rtlCol="0" anchor="t"/>
+          <a:bodyPr wrap="none" lIns="0" tIns="0" rIns="0" bIns="0" rtlCol="0" anchor="t"/>
           <a:lstStyle/>
           <a:p>
             <a:pPr algn="l" indent="0" marL="0">
@@ -4669,7 +4711,7 @@
           <a:ln/>
         </p:spPr>
         <p:txBody>
-          <a:bodyPr wrap="square" lIns="0" tIns="0" rIns="0" bIns="0" rtlCol="0" anchor="t"/>
+          <a:bodyPr wrap="none" lIns="0" tIns="0" rIns="0" bIns="0" rtlCol="0" anchor="t"/>
           <a:lstStyle/>
           <a:p>
             <a:pPr algn="l" indent="0" marL="0">
@@ -4711,7 +4753,7 @@
           <a:ln/>
         </p:spPr>
         <p:txBody>
-          <a:bodyPr wrap="square" lIns="0" tIns="0" rIns="0" bIns="0" rtlCol="0" anchor="t"/>
+          <a:bodyPr wrap="none" lIns="0" tIns="0" rIns="0" bIns="0" rtlCol="0" anchor="t"/>
           <a:lstStyle/>
           <a:p>
             <a:pPr algn="l" indent="0" marL="0">
@@ -4790,7 +4832,7 @@
           <a:ln/>
         </p:spPr>
         <p:txBody>
-          <a:bodyPr wrap="square" lIns="0" tIns="0" rIns="0" bIns="0" rtlCol="0" anchor="t"/>
+          <a:bodyPr wrap="none" lIns="0" tIns="0" rIns="0" bIns="0" rtlCol="0" anchor="t"/>
           <a:lstStyle/>
           <a:p>
             <a:pPr algn="l" indent="0" marL="0">
@@ -4835,7 +4877,7 @@
           <a:ln/>
         </p:spPr>
         <p:txBody>
-          <a:bodyPr wrap="square" lIns="0" tIns="0" rIns="0" bIns="0" rtlCol="0" anchor="t"/>
+          <a:bodyPr wrap="none" lIns="0" tIns="0" rIns="0" bIns="0" rtlCol="0" anchor="t"/>
           <a:lstStyle/>
           <a:p>
             <a:pPr algn="l" indent="0" marL="0">
@@ -4880,7 +4922,9 @@
           <a:ln/>
         </p:spPr>
         <p:txBody>
-          <a:bodyPr wrap="square" lIns="0" tIns="0" rIns="0" bIns="0" rtlCol="0" anchor="t"/>
+          <a:bodyPr wrap="square" lIns="0" tIns="0" rIns="0" bIns="0" rtlCol="0" anchor="t">
+            <a:normAutofit/>
+          </a:bodyPr>
           <a:lstStyle/>
           <a:p>
             <a:pPr algn="l" indent="0" marL="0">
@@ -4956,7 +5000,7 @@
           <a:ln/>
         </p:spPr>
         <p:txBody>
-          <a:bodyPr wrap="square" lIns="0" tIns="0" rIns="0" bIns="0" rtlCol="0" anchor="t"/>
+          <a:bodyPr wrap="none" lIns="0" tIns="0" rIns="0" bIns="0" rtlCol="0" anchor="t"/>
           <a:lstStyle/>
           <a:p>
             <a:pPr algn="l" indent="0" marL="0">
@@ -5001,7 +5045,7 @@
           <a:ln/>
         </p:spPr>
         <p:txBody>
-          <a:bodyPr wrap="square" lIns="0" tIns="0" rIns="0" bIns="0" rtlCol="0" anchor="t"/>
+          <a:bodyPr wrap="none" lIns="0" tIns="0" rIns="0" bIns="0" rtlCol="0" anchor="t"/>
           <a:lstStyle/>
           <a:p>
             <a:pPr algn="l" indent="0" marL="0">
@@ -5046,7 +5090,9 @@
           <a:ln/>
         </p:spPr>
         <p:txBody>
-          <a:bodyPr wrap="square" lIns="0" tIns="0" rIns="0" bIns="0" rtlCol="0" anchor="t"/>
+          <a:bodyPr wrap="square" lIns="0" tIns="0" rIns="0" bIns="0" rtlCol="0" anchor="t">
+            <a:normAutofit/>
+          </a:bodyPr>
           <a:lstStyle/>
           <a:p>
             <a:pPr algn="l" indent="0" marL="0">
@@ -5118,7 +5164,7 @@
           <a:ln/>
         </p:spPr>
         <p:txBody>
-          <a:bodyPr wrap="square" lIns="0" tIns="0" rIns="0" bIns="0" rtlCol="0" anchor="t"/>
+          <a:bodyPr wrap="none" lIns="0" tIns="0" rIns="0" bIns="0" rtlCol="0" anchor="t"/>
           <a:lstStyle/>
           <a:p>
             <a:pPr algn="l" indent="0" marL="0">
@@ -5193,7 +5239,7 @@
           <a:ln/>
         </p:spPr>
         <p:txBody>
-          <a:bodyPr wrap="square" lIns="0" tIns="0" rIns="0" bIns="0" rtlCol="0" anchor="t"/>
+          <a:bodyPr wrap="none" lIns="0" tIns="0" rIns="0" bIns="0" rtlCol="0" anchor="t"/>
           <a:lstStyle/>
           <a:p>
             <a:pPr algn="l" indent="0" marL="0">

--- a/decks/oncall-rotation/oncall-rotation.pptx
+++ b/decks/oncall-rotation/oncall-rotation.pptx
@@ -1333,9 +1333,7 @@
           <a:ln/>
         </p:spPr>
         <p:txBody>
-          <a:bodyPr wrap="square" lIns="0" tIns="0" rIns="0" bIns="0" rtlCol="0" anchor="t">
-            <a:normAutofit/>
-          </a:bodyPr>
+          <a:bodyPr wrap="none" lIns="0" tIns="0" rIns="0" bIns="0" rtlCol="0" anchor="t"/>
           <a:lstStyle/>
           <a:p>
             <a:pPr algn="l" indent="0" marL="0">
@@ -1427,9 +1425,7 @@
           <a:ln/>
         </p:spPr>
         <p:txBody>
-          <a:bodyPr wrap="square" lIns="0" tIns="0" rIns="0" bIns="0" rtlCol="0" anchor="t">
-            <a:normAutofit/>
-          </a:bodyPr>
+          <a:bodyPr wrap="none" lIns="0" tIns="0" rIns="0" bIns="0" rtlCol="0" anchor="t"/>
           <a:lstStyle/>
           <a:p>
             <a:pPr algn="l" indent="0" marL="0">
@@ -3403,9 +3399,7 @@
           <a:ln/>
         </p:spPr>
         <p:txBody>
-          <a:bodyPr wrap="square" lIns="0" tIns="0" rIns="0" bIns="0" rtlCol="0" anchor="t">
-            <a:normAutofit/>
-          </a:bodyPr>
+          <a:bodyPr wrap="none" lIns="0" tIns="0" rIns="0" bIns="0" rtlCol="0" anchor="t"/>
           <a:lstStyle/>
           <a:p>
             <a:pPr algn="l" indent="0" marL="0">
